--- a/public/lessons/year-6-maths/summer/week-23/use-approximate-imperial-conversions/teaching-powerpoint-v1.pptx
+++ b/public/lessons/year-6-maths/summer/week-23/use-approximate-imperial-conversions/teaching-powerpoint-v1.pptx
@@ -2,24 +2,24 @@
 <file path=ppt/presentation.xml><?xml version="1.0" encoding="utf-8"?>
 <p:presentation xmlns:p="http://schemas.openxmlformats.org/presentationml/2006/main">
   <p:sldMasterIdLst>
-    <p:sldMasterId xmlns:r="http://schemas.openxmlformats.org/officeDocument/2006/relationships" id="2147483648" r:id="R7204aa7e4ce2472e"/>
+    <p:sldMasterId xmlns:r="http://schemas.openxmlformats.org/officeDocument/2006/relationships" id="2147483648" r:id="R7ec019362fdf4e91"/>
   </p:sldMasterIdLst>
   <p:notesMasterIdLst>
-    <p:notesMasterId xmlns:r="http://schemas.openxmlformats.org/officeDocument/2006/relationships" r:id="Rb56087a3d9e044e3"/>
+    <p:notesMasterId xmlns:r="http://schemas.openxmlformats.org/officeDocument/2006/relationships" r:id="Rbd1aa672ebfd448e"/>
   </p:notesMasterIdLst>
   <p:sldIdLst>
-    <p:sldId xmlns:r="http://schemas.openxmlformats.org/officeDocument/2006/relationships" id="256" r:id="R0eea472a7ae441b1"/>
-    <p:sldId xmlns:r="http://schemas.openxmlformats.org/officeDocument/2006/relationships" id="257" r:id="R19f554efe7b341ba"/>
-    <p:sldId xmlns:r="http://schemas.openxmlformats.org/officeDocument/2006/relationships" id="258" r:id="R299193f4bea14b9b"/>
-    <p:sldId xmlns:r="http://schemas.openxmlformats.org/officeDocument/2006/relationships" id="259" r:id="Rcd02c439523c4d74"/>
-    <p:sldId xmlns:r="http://schemas.openxmlformats.org/officeDocument/2006/relationships" id="260" r:id="Rdac2b52b21a844c5"/>
-    <p:sldId xmlns:r="http://schemas.openxmlformats.org/officeDocument/2006/relationships" id="261" r:id="R440edc9abe314102"/>
-    <p:sldId xmlns:r="http://schemas.openxmlformats.org/officeDocument/2006/relationships" id="262" r:id="R99e9e87bd1134485"/>
-    <p:sldId xmlns:r="http://schemas.openxmlformats.org/officeDocument/2006/relationships" id="263" r:id="R5dd00414e7db46df"/>
-    <p:sldId xmlns:r="http://schemas.openxmlformats.org/officeDocument/2006/relationships" id="264" r:id="R3bafeb88b3f54945"/>
-    <p:sldId xmlns:r="http://schemas.openxmlformats.org/officeDocument/2006/relationships" id="265" r:id="Rb670a5348c47423e"/>
-    <p:sldId xmlns:r="http://schemas.openxmlformats.org/officeDocument/2006/relationships" id="266" r:id="Rd8dff949aadd412c"/>
-    <p:sldId xmlns:r="http://schemas.openxmlformats.org/officeDocument/2006/relationships" id="267" r:id="R3f56db57d8b4497a"/>
+    <p:sldId xmlns:r="http://schemas.openxmlformats.org/officeDocument/2006/relationships" id="256" r:id="Rf0dfca580e8d449a"/>
+    <p:sldId xmlns:r="http://schemas.openxmlformats.org/officeDocument/2006/relationships" id="257" r:id="R242e52dc1b4b4afa"/>
+    <p:sldId xmlns:r="http://schemas.openxmlformats.org/officeDocument/2006/relationships" id="258" r:id="R77bd655161e34b9c"/>
+    <p:sldId xmlns:r="http://schemas.openxmlformats.org/officeDocument/2006/relationships" id="259" r:id="R0854adf64fd84139"/>
+    <p:sldId xmlns:r="http://schemas.openxmlformats.org/officeDocument/2006/relationships" id="260" r:id="R81783671e66c46a0"/>
+    <p:sldId xmlns:r="http://schemas.openxmlformats.org/officeDocument/2006/relationships" id="261" r:id="Re26f033404704604"/>
+    <p:sldId xmlns:r="http://schemas.openxmlformats.org/officeDocument/2006/relationships" id="262" r:id="R82cba9c9cab943f7"/>
+    <p:sldId xmlns:r="http://schemas.openxmlformats.org/officeDocument/2006/relationships" id="263" r:id="R7a79c5947c7c428a"/>
+    <p:sldId xmlns:r="http://schemas.openxmlformats.org/officeDocument/2006/relationships" id="264" r:id="R0bc358fb7b4c4fa8"/>
+    <p:sldId xmlns:r="http://schemas.openxmlformats.org/officeDocument/2006/relationships" id="265" r:id="R3133c49d67284d9d"/>
+    <p:sldId xmlns:r="http://schemas.openxmlformats.org/officeDocument/2006/relationships" id="266" r:id="R63ced8e823434e2a"/>
+    <p:sldId xmlns:r="http://schemas.openxmlformats.org/officeDocument/2006/relationships" id="267" r:id="R0da51a14055440c4"/>
   </p:sldIdLst>
   <p:sldSz cx="12192000" cy="6858000"/>
   <p:notesSz cx="6858000" cy="9144000"/>
@@ -873,7 +873,7 @@
           <a:lstStyle xmlns:a="http://schemas.openxmlformats.org/drawingml/2006/main"/>
           <a:p xmlns:a="http://schemas.openxmlformats.org/drawingml/2006/main">
             <a:r>
-              <a:t>I do. Reveal the question, setup and each calculation stage one click at a time. Pupils watch before copying. Model answer: About 48 km.</a:t>
+              <a:t>I do. Reveal the question, then reveal each mathematical change one click at a time. Point to the numbers and operation that changed before moving to the next line. Final answer: About 48 km.</a:t>
             </a:r>
           </a:p>
         </p:txBody>
@@ -1291,7 +1291,7 @@
   </p:cSld>
   <p:clrMap bg1="lt1" tx1="dk1" bg2="lt2" tx2="dk2" accent1="accent1" accent2="accent2" accent3="accent3" accent4="accent4" accent5="accent5" accent6="accent6" hlink="hlink" folHlink="folHlink"/>
   <p:sldLayoutIdLst>
-    <p:sldLayoutId xmlns:r="http://schemas.openxmlformats.org/officeDocument/2006/relationships" id="2147483649" r:id="R28b936e2a2344577"/>
+    <p:sldLayoutId xmlns:r="http://schemas.openxmlformats.org/officeDocument/2006/relationships" id="2147483649" r:id="R06f906c5bea04ee9"/>
   </p:sldLayoutIdLst>
   <p:txStyles>
     <p:titleStyle>
@@ -1842,7 +1842,7 @@
           <p:cNvPr id="12" name="">
             <a:extLst xmlns:a="http://schemas.openxmlformats.org/drawingml/2006/main">
               <a:ext uri="{FF2B5EF4-FFF2-40B4-BE49-F238E27FC236}">
-                <a16:creationId xmlns:a16="http://schemas.microsoft.com/office/drawing/2014/main" id="{3AFC49B4-EEED-4786-93A4-914EB7528B23}"/>
+                <a16:creationId xmlns:a16="http://schemas.microsoft.com/office/drawing/2014/main" id="{14C31DB3-7B6B-4F7A-8580-1D9E1191FA48}"/>
               </a:ext>
             </a:extLst>
           </p:cNvPr>
@@ -1874,7 +1874,7 @@
           <p:cNvPr id="2" name="">
             <a:extLst xmlns:a="http://schemas.openxmlformats.org/drawingml/2006/main">
               <a:ext uri="{FF2B5EF4-FFF2-40B4-BE49-F238E27FC236}">
-                <a16:creationId xmlns:a16="http://schemas.microsoft.com/office/drawing/2014/main" id="{8CD61328-9079-4E03-9952-9ABC7DDE74B8}"/>
+                <a16:creationId xmlns:a16="http://schemas.microsoft.com/office/drawing/2014/main" id="{82E16DF2-14E6-488E-A76F-A284855A217A}"/>
               </a:ext>
             </a:extLst>
           </p:cNvPr>
@@ -1931,7 +1931,7 @@
           <p:cNvPr id="3" name="">
             <a:extLst xmlns:a="http://schemas.openxmlformats.org/drawingml/2006/main">
               <a:ext uri="{FF2B5EF4-FFF2-40B4-BE49-F238E27FC236}">
-                <a16:creationId xmlns:a16="http://schemas.microsoft.com/office/drawing/2014/main" id="{0FDB66B1-F906-4A87-9555-EFBBDD79ECC9}"/>
+                <a16:creationId xmlns:a16="http://schemas.microsoft.com/office/drawing/2014/main" id="{ED28F58F-E473-43F8-8A3E-6F561D68C506}"/>
               </a:ext>
             </a:extLst>
           </p:cNvPr>
@@ -1965,7 +1965,7 @@
           <p:cNvPr id="4" name="">
             <a:extLst xmlns:a="http://schemas.openxmlformats.org/drawingml/2006/main">
               <a:ext uri="{FF2B5EF4-FFF2-40B4-BE49-F238E27FC236}">
-                <a16:creationId xmlns:a16="http://schemas.microsoft.com/office/drawing/2014/main" id="{D5905C45-688E-42F2-ABFE-2319C789DD98}"/>
+                <a16:creationId xmlns:a16="http://schemas.microsoft.com/office/drawing/2014/main" id="{8C7D611D-553D-463E-977C-D0C15EBA9DE9}"/>
               </a:ext>
             </a:extLst>
           </p:cNvPr>
@@ -2022,7 +2022,7 @@
           <p:cNvPr id="5" name="">
             <a:extLst xmlns:a="http://schemas.openxmlformats.org/drawingml/2006/main">
               <a:ext uri="{FF2B5EF4-FFF2-40B4-BE49-F238E27FC236}">
-                <a16:creationId xmlns:a16="http://schemas.microsoft.com/office/drawing/2014/main" id="{CFC54E3A-0331-4420-9BEB-16ED9F5D1178}"/>
+                <a16:creationId xmlns:a16="http://schemas.microsoft.com/office/drawing/2014/main" id="{E9635CEA-ED88-4708-9594-D4DB57AB1BE7}"/>
               </a:ext>
             </a:extLst>
           </p:cNvPr>
@@ -2079,7 +2079,7 @@
           <p:cNvPr id="6" name="">
             <a:extLst xmlns:a="http://schemas.openxmlformats.org/drawingml/2006/main">
               <a:ext uri="{FF2B5EF4-FFF2-40B4-BE49-F238E27FC236}">
-                <a16:creationId xmlns:a16="http://schemas.microsoft.com/office/drawing/2014/main" id="{BE7E7F4D-644D-4998-929E-A2B16ABF33AF}"/>
+                <a16:creationId xmlns:a16="http://schemas.microsoft.com/office/drawing/2014/main" id="{AE349C5E-303E-4891-B6A3-CF4F605BCD07}"/>
               </a:ext>
             </a:extLst>
           </p:cNvPr>
@@ -2113,7 +2113,7 @@
           <p:cNvPr id="7" name="">
             <a:extLst xmlns:a="http://schemas.openxmlformats.org/drawingml/2006/main">
               <a:ext uri="{FF2B5EF4-FFF2-40B4-BE49-F238E27FC236}">
-                <a16:creationId xmlns:a16="http://schemas.microsoft.com/office/drawing/2014/main" id="{1B5E2700-33AF-4C17-BB4D-0FB3BCFA4478}"/>
+                <a16:creationId xmlns:a16="http://schemas.microsoft.com/office/drawing/2014/main" id="{75023C58-9E1B-4A5B-902B-25299A1B499A}"/>
               </a:ext>
             </a:extLst>
           </p:cNvPr>
@@ -2170,7 +2170,7 @@
           <p:cNvPr id="8" name="">
             <a:extLst xmlns:a="http://schemas.openxmlformats.org/drawingml/2006/main">
               <a:ext uri="{FF2B5EF4-FFF2-40B4-BE49-F238E27FC236}">
-                <a16:creationId xmlns:a16="http://schemas.microsoft.com/office/drawing/2014/main" id="{CFC48DF8-F530-4FC6-8B3D-070CEA29CBDC}"/>
+                <a16:creationId xmlns:a16="http://schemas.microsoft.com/office/drawing/2014/main" id="{14AC7A8E-F41E-4C77-A28E-DC067C56004A}"/>
               </a:ext>
             </a:extLst>
           </p:cNvPr>
@@ -2227,7 +2227,7 @@
           <p:cNvPr id="9" name="">
             <a:extLst xmlns:a="http://schemas.openxmlformats.org/drawingml/2006/main">
               <a:ext uri="{FF2B5EF4-FFF2-40B4-BE49-F238E27FC236}">
-                <a16:creationId xmlns:a16="http://schemas.microsoft.com/office/drawing/2014/main" id="{E90BA4BC-1B3E-4EF1-9D3D-B8ACC86BFBF2}"/>
+                <a16:creationId xmlns:a16="http://schemas.microsoft.com/office/drawing/2014/main" id="{D750958C-F387-458C-BEB0-A97062360E01}"/>
               </a:ext>
             </a:extLst>
           </p:cNvPr>
@@ -2284,7 +2284,7 @@
           <p:cNvPr id="10" name="">
             <a:extLst xmlns:a="http://schemas.openxmlformats.org/drawingml/2006/main">
               <a:ext uri="{FF2B5EF4-FFF2-40B4-BE49-F238E27FC236}">
-                <a16:creationId xmlns:a16="http://schemas.microsoft.com/office/drawing/2014/main" id="{C01F04C1-E9F3-48D5-81A5-56A1C3ECED1E}"/>
+                <a16:creationId xmlns:a16="http://schemas.microsoft.com/office/drawing/2014/main" id="{D540D4D9-0E18-4B40-BDC8-DAD818339CC8}"/>
               </a:ext>
             </a:extLst>
           </p:cNvPr>
@@ -2341,7 +2341,7 @@
           <p:cNvPr id="11" name="">
             <a:extLst xmlns:a="http://schemas.openxmlformats.org/drawingml/2006/main">
               <a:ext uri="{FF2B5EF4-FFF2-40B4-BE49-F238E27FC236}">
-                <a16:creationId xmlns:a16="http://schemas.microsoft.com/office/drawing/2014/main" id="{CFCDABD7-FAFD-42A9-A868-FB13D1DC13B3}"/>
+                <a16:creationId xmlns:a16="http://schemas.microsoft.com/office/drawing/2014/main" id="{32A3CAFE-605D-43AB-8546-A3408E4227A0}"/>
               </a:ext>
             </a:extLst>
           </p:cNvPr>
@@ -2396,7 +2396,7 @@
     </p:spTree>
     <p:extLst>
       <p:ext uri="{BB962C8B-B14F-4D97-AF65-F5344CB8AC3E}">
-        <p14:creationId xmlns:p14="http://schemas.microsoft.com/office/powerpoint/2010/main" val="1287714236"/>
+        <p14:creationId xmlns:p14="http://schemas.microsoft.com/office/powerpoint/2010/main" val="503791302"/>
       </p:ext>
     </p:extLst>
   </p:cSld>
@@ -2427,7 +2427,7 @@
           <p:cNvPr id="14" name="">
             <a:extLst xmlns:a="http://schemas.openxmlformats.org/drawingml/2006/main">
               <a:ext uri="{FF2B5EF4-FFF2-40B4-BE49-F238E27FC236}">
-                <a16:creationId xmlns:a16="http://schemas.microsoft.com/office/drawing/2014/main" id="{589A8828-CDFD-459A-99B3-ED0FF9159712}"/>
+                <a16:creationId xmlns:a16="http://schemas.microsoft.com/office/drawing/2014/main" id="{D69412C4-D663-4B88-9CAE-ADECE584A9B6}"/>
               </a:ext>
             </a:extLst>
           </p:cNvPr>
@@ -2459,7 +2459,7 @@
           <p:cNvPr id="2" name="">
             <a:extLst xmlns:a="http://schemas.openxmlformats.org/drawingml/2006/main">
               <a:ext uri="{FF2B5EF4-FFF2-40B4-BE49-F238E27FC236}">
-                <a16:creationId xmlns:a16="http://schemas.microsoft.com/office/drawing/2014/main" id="{0DF8D64F-4985-44B8-9B91-6C3B776D7888}"/>
+                <a16:creationId xmlns:a16="http://schemas.microsoft.com/office/drawing/2014/main" id="{7C5ECD7F-870C-474F-A5F4-AE42738596EB}"/>
               </a:ext>
             </a:extLst>
           </p:cNvPr>
@@ -2516,7 +2516,7 @@
           <p:cNvPr id="3" name="">
             <a:extLst xmlns:a="http://schemas.openxmlformats.org/drawingml/2006/main">
               <a:ext uri="{FF2B5EF4-FFF2-40B4-BE49-F238E27FC236}">
-                <a16:creationId xmlns:a16="http://schemas.microsoft.com/office/drawing/2014/main" id="{E7FE2FD5-D14C-40A4-AF00-AB1A4F47D180}"/>
+                <a16:creationId xmlns:a16="http://schemas.microsoft.com/office/drawing/2014/main" id="{CE4A6825-24A0-4412-A9FD-A1A7F785B3FD}"/>
               </a:ext>
             </a:extLst>
           </p:cNvPr>
@@ -2548,7 +2548,7 @@
           <p:cNvPr id="4" name="">
             <a:extLst xmlns:a="http://schemas.openxmlformats.org/drawingml/2006/main">
               <a:ext uri="{FF2B5EF4-FFF2-40B4-BE49-F238E27FC236}">
-                <a16:creationId xmlns:a16="http://schemas.microsoft.com/office/drawing/2014/main" id="{266E5AE9-A24C-4120-9141-6AF0E2E52A74}"/>
+                <a16:creationId xmlns:a16="http://schemas.microsoft.com/office/drawing/2014/main" id="{881485F1-7E15-4EE9-B862-4B6D6C72676B}"/>
               </a:ext>
             </a:extLst>
           </p:cNvPr>
@@ -2605,7 +2605,7 @@
           <p:cNvPr id="5" name="">
             <a:extLst xmlns:a="http://schemas.openxmlformats.org/drawingml/2006/main">
               <a:ext uri="{FF2B5EF4-FFF2-40B4-BE49-F238E27FC236}">
-                <a16:creationId xmlns:a16="http://schemas.microsoft.com/office/drawing/2014/main" id="{94F9C531-3248-433D-B548-C4DAE3AA211F}"/>
+                <a16:creationId xmlns:a16="http://schemas.microsoft.com/office/drawing/2014/main" id="{236198E9-24AA-459E-B3F1-8BB4561A7DCE}"/>
               </a:ext>
             </a:extLst>
           </p:cNvPr>
@@ -2662,7 +2662,7 @@
           <p:cNvPr id="6" name="">
             <a:extLst xmlns:a="http://schemas.openxmlformats.org/drawingml/2006/main">
               <a:ext uri="{FF2B5EF4-FFF2-40B4-BE49-F238E27FC236}">
-                <a16:creationId xmlns:a16="http://schemas.microsoft.com/office/drawing/2014/main" id="{18477AAE-F950-404A-8420-D479298CB5B0}"/>
+                <a16:creationId xmlns:a16="http://schemas.microsoft.com/office/drawing/2014/main" id="{F38F39B6-175A-4F7B-98F4-09B9D49B045C}"/>
               </a:ext>
             </a:extLst>
           </p:cNvPr>
@@ -2719,7 +2719,7 @@
           <p:cNvPr id="7" name="">
             <a:extLst xmlns:a="http://schemas.openxmlformats.org/drawingml/2006/main">
               <a:ext uri="{FF2B5EF4-FFF2-40B4-BE49-F238E27FC236}">
-                <a16:creationId xmlns:a16="http://schemas.microsoft.com/office/drawing/2014/main" id="{CA7C138D-68AB-49B6-A8B3-7C044522D7EE}"/>
+                <a16:creationId xmlns:a16="http://schemas.microsoft.com/office/drawing/2014/main" id="{B5997742-FDB1-44F5-B653-A90A3EF8EC60}"/>
               </a:ext>
             </a:extLst>
           </p:cNvPr>
@@ -2751,7 +2751,7 @@
           <p:cNvPr id="8" name="">
             <a:extLst xmlns:a="http://schemas.openxmlformats.org/drawingml/2006/main">
               <a:ext uri="{FF2B5EF4-FFF2-40B4-BE49-F238E27FC236}">
-                <a16:creationId xmlns:a16="http://schemas.microsoft.com/office/drawing/2014/main" id="{90BFE030-6788-46C9-97B0-006536BFBA1B}"/>
+                <a16:creationId xmlns:a16="http://schemas.microsoft.com/office/drawing/2014/main" id="{AC402502-19AE-458A-9B06-4A2F4367BFBC}"/>
               </a:ext>
             </a:extLst>
           </p:cNvPr>
@@ -2808,7 +2808,7 @@
           <p:cNvPr id="9" name="">
             <a:extLst xmlns:a="http://schemas.openxmlformats.org/drawingml/2006/main">
               <a:ext uri="{FF2B5EF4-FFF2-40B4-BE49-F238E27FC236}">
-                <a16:creationId xmlns:a16="http://schemas.microsoft.com/office/drawing/2014/main" id="{A48C15E8-D9DF-43B9-88E1-6B23F02E40C8}"/>
+                <a16:creationId xmlns:a16="http://schemas.microsoft.com/office/drawing/2014/main" id="{754B9383-5081-4300-97F4-2B28E9716904}"/>
               </a:ext>
             </a:extLst>
           </p:cNvPr>
@@ -2865,7 +2865,7 @@
           <p:cNvPr id="10" name="">
             <a:extLst xmlns:a="http://schemas.openxmlformats.org/drawingml/2006/main">
               <a:ext uri="{FF2B5EF4-FFF2-40B4-BE49-F238E27FC236}">
-                <a16:creationId xmlns:a16="http://schemas.microsoft.com/office/drawing/2014/main" id="{47E2140B-E668-4F69-A4EC-9FBB30395B73}"/>
+                <a16:creationId xmlns:a16="http://schemas.microsoft.com/office/drawing/2014/main" id="{00D11286-1B75-4DC8-AA43-39F1287A52FD}"/>
               </a:ext>
             </a:extLst>
           </p:cNvPr>
@@ -2922,7 +2922,7 @@
           <p:cNvPr id="11" name="">
             <a:extLst xmlns:a="http://schemas.openxmlformats.org/drawingml/2006/main">
               <a:ext uri="{FF2B5EF4-FFF2-40B4-BE49-F238E27FC236}">
-                <a16:creationId xmlns:a16="http://schemas.microsoft.com/office/drawing/2014/main" id="{01A6522E-561F-4E73-A38E-C6F30C5258DB}"/>
+                <a16:creationId xmlns:a16="http://schemas.microsoft.com/office/drawing/2014/main" id="{20074D62-9844-4B5B-B863-98B9DBA99488}"/>
               </a:ext>
             </a:extLst>
           </p:cNvPr>
@@ -2979,7 +2979,7 @@
           <p:cNvPr id="12" name="">
             <a:extLst xmlns:a="http://schemas.openxmlformats.org/drawingml/2006/main">
               <a:ext uri="{FF2B5EF4-FFF2-40B4-BE49-F238E27FC236}">
-                <a16:creationId xmlns:a16="http://schemas.microsoft.com/office/drawing/2014/main" id="{3F4DA518-3341-42E4-AD9E-068DC573A390}"/>
+                <a16:creationId xmlns:a16="http://schemas.microsoft.com/office/drawing/2014/main" id="{69A64200-FEB3-4FCB-B011-BEFEA2C39100}"/>
               </a:ext>
             </a:extLst>
           </p:cNvPr>
@@ -3036,7 +3036,7 @@
           <p:cNvPr id="13" name="">
             <a:extLst xmlns:a="http://schemas.openxmlformats.org/drawingml/2006/main">
               <a:ext uri="{FF2B5EF4-FFF2-40B4-BE49-F238E27FC236}">
-                <a16:creationId xmlns:a16="http://schemas.microsoft.com/office/drawing/2014/main" id="{4671C4E9-B4F6-4AE7-9375-A2C91D2FD0E1}"/>
+                <a16:creationId xmlns:a16="http://schemas.microsoft.com/office/drawing/2014/main" id="{3C5B572F-066D-4EF0-97A8-241EA8643014}"/>
               </a:ext>
             </a:extLst>
           </p:cNvPr>
@@ -3091,7 +3091,7 @@
     </p:spTree>
     <p:extLst>
       <p:ext uri="{BB962C8B-B14F-4D97-AF65-F5344CB8AC3E}">
-        <p14:creationId xmlns:p14="http://schemas.microsoft.com/office/powerpoint/2010/main" val="382979558"/>
+        <p14:creationId xmlns:p14="http://schemas.microsoft.com/office/powerpoint/2010/main" val="389366527"/>
       </p:ext>
     </p:extLst>
   </p:cSld>
@@ -3292,7 +3292,7 @@
           <p:cNvPr id="19" name="">
             <a:extLst xmlns:a="http://schemas.openxmlformats.org/drawingml/2006/main">
               <a:ext uri="{FF2B5EF4-FFF2-40B4-BE49-F238E27FC236}">
-                <a16:creationId xmlns:a16="http://schemas.microsoft.com/office/drawing/2014/main" id="{98DC0966-1903-46B8-97EE-8BBE82B5575D}"/>
+                <a16:creationId xmlns:a16="http://schemas.microsoft.com/office/drawing/2014/main" id="{E39DC57F-E03E-41BE-B4F4-F046786A7F0E}"/>
               </a:ext>
             </a:extLst>
           </p:cNvPr>
@@ -3324,7 +3324,7 @@
           <p:cNvPr id="2" name="">
             <a:extLst xmlns:a="http://schemas.openxmlformats.org/drawingml/2006/main">
               <a:ext uri="{FF2B5EF4-FFF2-40B4-BE49-F238E27FC236}">
-                <a16:creationId xmlns:a16="http://schemas.microsoft.com/office/drawing/2014/main" id="{CC6E3D97-7987-40AF-BA78-4A8B0453150A}"/>
+                <a16:creationId xmlns:a16="http://schemas.microsoft.com/office/drawing/2014/main" id="{42035B89-605A-4DF6-99A8-92A2389580C0}"/>
               </a:ext>
             </a:extLst>
           </p:cNvPr>
@@ -3381,7 +3381,7 @@
           <p:cNvPr id="3" name="">
             <a:extLst xmlns:a="http://schemas.openxmlformats.org/drawingml/2006/main">
               <a:ext uri="{FF2B5EF4-FFF2-40B4-BE49-F238E27FC236}">
-                <a16:creationId xmlns:a16="http://schemas.microsoft.com/office/drawing/2014/main" id="{2A63EB63-809A-4AAE-BAE3-E38C4A800623}"/>
+                <a16:creationId xmlns:a16="http://schemas.microsoft.com/office/drawing/2014/main" id="{2DB0C422-6BE9-4E36-A35D-E57E2C73B343}"/>
               </a:ext>
             </a:extLst>
           </p:cNvPr>
@@ -3413,7 +3413,7 @@
           <p:cNvPr id="4" name="">
             <a:extLst xmlns:a="http://schemas.openxmlformats.org/drawingml/2006/main">
               <a:ext uri="{FF2B5EF4-FFF2-40B4-BE49-F238E27FC236}">
-                <a16:creationId xmlns:a16="http://schemas.microsoft.com/office/drawing/2014/main" id="{C15209A6-74DB-4338-8FD8-865F758F334E}"/>
+                <a16:creationId xmlns:a16="http://schemas.microsoft.com/office/drawing/2014/main" id="{77B1ECAB-249A-4171-966C-2AE7E85247B3}"/>
               </a:ext>
             </a:extLst>
           </p:cNvPr>
@@ -3470,7 +3470,7 @@
           <p:cNvPr id="5" name="">
             <a:extLst xmlns:a="http://schemas.openxmlformats.org/drawingml/2006/main">
               <a:ext uri="{FF2B5EF4-FFF2-40B4-BE49-F238E27FC236}">
-                <a16:creationId xmlns:a16="http://schemas.microsoft.com/office/drawing/2014/main" id="{54F214A3-7977-4F50-BE8D-00A326B9F0E3}"/>
+                <a16:creationId xmlns:a16="http://schemas.microsoft.com/office/drawing/2014/main" id="{5E996F59-A95D-4191-8FD5-6088C72B6267}"/>
               </a:ext>
             </a:extLst>
           </p:cNvPr>
@@ -3527,7 +3527,7 @@
           <p:cNvPr id="6" name="">
             <a:extLst xmlns:a="http://schemas.openxmlformats.org/drawingml/2006/main">
               <a:ext uri="{FF2B5EF4-FFF2-40B4-BE49-F238E27FC236}">
-                <a16:creationId xmlns:a16="http://schemas.microsoft.com/office/drawing/2014/main" id="{8CCE53D9-CCF0-485A-90FD-87562E57C302}"/>
+                <a16:creationId xmlns:a16="http://schemas.microsoft.com/office/drawing/2014/main" id="{39523BEE-BA26-4F35-81BB-852DE7A35514}"/>
               </a:ext>
             </a:extLst>
           </p:cNvPr>
@@ -3584,7 +3584,7 @@
           <p:cNvPr id="7" name="">
             <a:extLst xmlns:a="http://schemas.openxmlformats.org/drawingml/2006/main">
               <a:ext uri="{FF2B5EF4-FFF2-40B4-BE49-F238E27FC236}">
-                <a16:creationId xmlns:a16="http://schemas.microsoft.com/office/drawing/2014/main" id="{73DBA0A5-0BD4-453E-B8D2-54B1988B69CD}"/>
+                <a16:creationId xmlns:a16="http://schemas.microsoft.com/office/drawing/2014/main" id="{A7F6519C-88B7-4A5B-A661-B33BB43D12FD}"/>
               </a:ext>
             </a:extLst>
           </p:cNvPr>
@@ -3616,7 +3616,7 @@
           <p:cNvPr id="8" name="">
             <a:extLst xmlns:a="http://schemas.openxmlformats.org/drawingml/2006/main">
               <a:ext uri="{FF2B5EF4-FFF2-40B4-BE49-F238E27FC236}">
-                <a16:creationId xmlns:a16="http://schemas.microsoft.com/office/drawing/2014/main" id="{1202894F-425C-4A49-A18A-9802024F2EEF}"/>
+                <a16:creationId xmlns:a16="http://schemas.microsoft.com/office/drawing/2014/main" id="{751CE5CF-EB1C-4BD0-8961-AA7E6F57FD33}"/>
               </a:ext>
             </a:extLst>
           </p:cNvPr>
@@ -3673,7 +3673,7 @@
           <p:cNvPr id="9" name="">
             <a:extLst xmlns:a="http://schemas.openxmlformats.org/drawingml/2006/main">
               <a:ext uri="{FF2B5EF4-FFF2-40B4-BE49-F238E27FC236}">
-                <a16:creationId xmlns:a16="http://schemas.microsoft.com/office/drawing/2014/main" id="{E7B8917F-F7E9-430B-B15A-CF8B13B74A4B}"/>
+                <a16:creationId xmlns:a16="http://schemas.microsoft.com/office/drawing/2014/main" id="{5241D8B7-E9DF-490F-A3B0-6ACA98ED7843}"/>
               </a:ext>
             </a:extLst>
           </p:cNvPr>
@@ -3730,7 +3730,7 @@
           <p:cNvPr id="10" name="">
             <a:extLst xmlns:a="http://schemas.openxmlformats.org/drawingml/2006/main">
               <a:ext uri="{FF2B5EF4-FFF2-40B4-BE49-F238E27FC236}">
-                <a16:creationId xmlns:a16="http://schemas.microsoft.com/office/drawing/2014/main" id="{BB2E721A-A146-4D08-9AB9-75369E53F944}"/>
+                <a16:creationId xmlns:a16="http://schemas.microsoft.com/office/drawing/2014/main" id="{730F419A-18AC-4143-B4F1-ED1C1371D7E8}"/>
               </a:ext>
             </a:extLst>
           </p:cNvPr>
@@ -3787,7 +3787,7 @@
           <p:cNvPr id="11" name="">
             <a:extLst xmlns:a="http://schemas.openxmlformats.org/drawingml/2006/main">
               <a:ext uri="{FF2B5EF4-FFF2-40B4-BE49-F238E27FC236}">
-                <a16:creationId xmlns:a16="http://schemas.microsoft.com/office/drawing/2014/main" id="{7248A7E1-692B-424D-A7E1-3C8A82800A28}"/>
+                <a16:creationId xmlns:a16="http://schemas.microsoft.com/office/drawing/2014/main" id="{43D22705-2A74-4135-8539-2C335829B5F6}"/>
               </a:ext>
             </a:extLst>
           </p:cNvPr>
@@ -3821,7 +3821,7 @@
           <p:cNvPr id="12" name="">
             <a:extLst xmlns:a="http://schemas.openxmlformats.org/drawingml/2006/main">
               <a:ext uri="{FF2B5EF4-FFF2-40B4-BE49-F238E27FC236}">
-                <a16:creationId xmlns:a16="http://schemas.microsoft.com/office/drawing/2014/main" id="{73A6B5E8-C340-4A58-8A8F-49B71F9250F7}"/>
+                <a16:creationId xmlns:a16="http://schemas.microsoft.com/office/drawing/2014/main" id="{D6401A4B-55A2-4C69-941E-8FA7C2DDAE4F}"/>
               </a:ext>
             </a:extLst>
           </p:cNvPr>
@@ -3878,7 +3878,7 @@
           <p:cNvPr id="13" name="">
             <a:extLst xmlns:a="http://schemas.openxmlformats.org/drawingml/2006/main">
               <a:ext uri="{FF2B5EF4-FFF2-40B4-BE49-F238E27FC236}">
-                <a16:creationId xmlns:a16="http://schemas.microsoft.com/office/drawing/2014/main" id="{15CF76C2-3596-4329-B5F0-14EB258D0F07}"/>
+                <a16:creationId xmlns:a16="http://schemas.microsoft.com/office/drawing/2014/main" id="{AD099A13-27F7-4AD1-BFAA-745BF1CA5071}"/>
               </a:ext>
             </a:extLst>
           </p:cNvPr>
@@ -3935,7 +3935,7 @@
           <p:cNvPr id="14" name="">
             <a:extLst xmlns:a="http://schemas.openxmlformats.org/drawingml/2006/main">
               <a:ext uri="{FF2B5EF4-FFF2-40B4-BE49-F238E27FC236}">
-                <a16:creationId xmlns:a16="http://schemas.microsoft.com/office/drawing/2014/main" id="{D5F2BB23-F2E4-42BA-9C97-ACDBC587316B}"/>
+                <a16:creationId xmlns:a16="http://schemas.microsoft.com/office/drawing/2014/main" id="{08BDE77C-2B5C-42F9-93E3-826D62537836}"/>
               </a:ext>
             </a:extLst>
           </p:cNvPr>
@@ -3992,7 +3992,7 @@
           <p:cNvPr id="15" name="">
             <a:extLst xmlns:a="http://schemas.openxmlformats.org/drawingml/2006/main">
               <a:ext uri="{FF2B5EF4-FFF2-40B4-BE49-F238E27FC236}">
-                <a16:creationId xmlns:a16="http://schemas.microsoft.com/office/drawing/2014/main" id="{61FF79E5-1034-4B56-ACAD-4E2FE4522ACF}"/>
+                <a16:creationId xmlns:a16="http://schemas.microsoft.com/office/drawing/2014/main" id="{9F552445-D676-4BEF-B7F2-06230F8DEEDE}"/>
               </a:ext>
             </a:extLst>
           </p:cNvPr>
@@ -4026,7 +4026,7 @@
           <p:cNvPr id="16" name="">
             <a:extLst xmlns:a="http://schemas.openxmlformats.org/drawingml/2006/main">
               <a:ext uri="{FF2B5EF4-FFF2-40B4-BE49-F238E27FC236}">
-                <a16:creationId xmlns:a16="http://schemas.microsoft.com/office/drawing/2014/main" id="{605613E5-59E7-48CD-A10B-B04351AA43D2}"/>
+                <a16:creationId xmlns:a16="http://schemas.microsoft.com/office/drawing/2014/main" id="{FBB2DA59-CF66-4F63-927B-CF4D7D92C794}"/>
               </a:ext>
             </a:extLst>
           </p:cNvPr>
@@ -4083,7 +4083,7 @@
           <p:cNvPr id="17" name="">
             <a:extLst xmlns:a="http://schemas.openxmlformats.org/drawingml/2006/main">
               <a:ext uri="{FF2B5EF4-FFF2-40B4-BE49-F238E27FC236}">
-                <a16:creationId xmlns:a16="http://schemas.microsoft.com/office/drawing/2014/main" id="{5CBE0E82-A86B-4FAF-9368-E3E01045B011}"/>
+                <a16:creationId xmlns:a16="http://schemas.microsoft.com/office/drawing/2014/main" id="{4B88DD36-FB69-4E83-89CB-A6308B1DEB30}"/>
               </a:ext>
             </a:extLst>
           </p:cNvPr>
@@ -4140,7 +4140,7 @@
           <p:cNvPr id="18" name="">
             <a:extLst xmlns:a="http://schemas.openxmlformats.org/drawingml/2006/main">
               <a:ext uri="{FF2B5EF4-FFF2-40B4-BE49-F238E27FC236}">
-                <a16:creationId xmlns:a16="http://schemas.microsoft.com/office/drawing/2014/main" id="{65C8C9BA-AFB9-47CD-882A-8A3D60E55D37}"/>
+                <a16:creationId xmlns:a16="http://schemas.microsoft.com/office/drawing/2014/main" id="{6CB3EF89-FDC3-43A3-A60C-97581840CD8D}"/>
               </a:ext>
             </a:extLst>
           </p:cNvPr>
@@ -4195,7 +4195,7 @@
     </p:spTree>
     <p:extLst>
       <p:ext uri="{BB962C8B-B14F-4D97-AF65-F5344CB8AC3E}">
-        <p14:creationId xmlns:p14="http://schemas.microsoft.com/office/powerpoint/2010/main" val="329673073"/>
+        <p14:creationId xmlns:p14="http://schemas.microsoft.com/office/powerpoint/2010/main" val="2123446848"/>
       </p:ext>
     </p:extLst>
   </p:cSld>
@@ -4350,7 +4350,7 @@
           <p:cNvPr id="23" name="">
             <a:extLst xmlns:a="http://schemas.openxmlformats.org/drawingml/2006/main">
               <a:ext uri="{FF2B5EF4-FFF2-40B4-BE49-F238E27FC236}">
-                <a16:creationId xmlns:a16="http://schemas.microsoft.com/office/drawing/2014/main" id="{6E6077A9-2EA4-4433-96E2-0404D3BFA8C4}"/>
+                <a16:creationId xmlns:a16="http://schemas.microsoft.com/office/drawing/2014/main" id="{9755FBEE-AFCD-48D0-A4E4-42F070CDE9CC}"/>
               </a:ext>
             </a:extLst>
           </p:cNvPr>
@@ -4382,7 +4382,7 @@
           <p:cNvPr id="2" name="">
             <a:extLst xmlns:a="http://schemas.openxmlformats.org/drawingml/2006/main">
               <a:ext uri="{FF2B5EF4-FFF2-40B4-BE49-F238E27FC236}">
-                <a16:creationId xmlns:a16="http://schemas.microsoft.com/office/drawing/2014/main" id="{D23614F0-2C01-4940-8C83-59D340ECF006}"/>
+                <a16:creationId xmlns:a16="http://schemas.microsoft.com/office/drawing/2014/main" id="{CAD1B7E0-7FEA-4AC9-A931-C4AC0591C42A}"/>
               </a:ext>
             </a:extLst>
           </p:cNvPr>
@@ -4439,7 +4439,7 @@
           <p:cNvPr id="3" name="">
             <a:extLst xmlns:a="http://schemas.openxmlformats.org/drawingml/2006/main">
               <a:ext uri="{FF2B5EF4-FFF2-40B4-BE49-F238E27FC236}">
-                <a16:creationId xmlns:a16="http://schemas.microsoft.com/office/drawing/2014/main" id="{CDE1900C-13C6-4EC6-9D7C-1ADBF99CBFF6}"/>
+                <a16:creationId xmlns:a16="http://schemas.microsoft.com/office/drawing/2014/main" id="{DD408413-CB1A-40F2-B0E6-B2F44104A228}"/>
               </a:ext>
             </a:extLst>
           </p:cNvPr>
@@ -4471,7 +4471,7 @@
           <p:cNvPr id="4" name="">
             <a:extLst xmlns:a="http://schemas.openxmlformats.org/drawingml/2006/main">
               <a:ext uri="{FF2B5EF4-FFF2-40B4-BE49-F238E27FC236}">
-                <a16:creationId xmlns:a16="http://schemas.microsoft.com/office/drawing/2014/main" id="{ABC94616-7EBD-4869-8FE9-A64EBA2A1014}"/>
+                <a16:creationId xmlns:a16="http://schemas.microsoft.com/office/drawing/2014/main" id="{69C2089F-9D46-4898-B35E-B26127F5A59C}"/>
               </a:ext>
             </a:extLst>
           </p:cNvPr>
@@ -4528,7 +4528,7 @@
           <p:cNvPr id="5" name="">
             <a:extLst xmlns:a="http://schemas.openxmlformats.org/drawingml/2006/main">
               <a:ext uri="{FF2B5EF4-FFF2-40B4-BE49-F238E27FC236}">
-                <a16:creationId xmlns:a16="http://schemas.microsoft.com/office/drawing/2014/main" id="{FC84E1CE-771E-4544-BC77-6875142B125D}"/>
+                <a16:creationId xmlns:a16="http://schemas.microsoft.com/office/drawing/2014/main" id="{F2B2E346-2422-4AD8-A802-1E2C44E8F9F9}"/>
               </a:ext>
             </a:extLst>
           </p:cNvPr>
@@ -4585,7 +4585,7 @@
           <p:cNvPr id="6" name="">
             <a:extLst xmlns:a="http://schemas.openxmlformats.org/drawingml/2006/main">
               <a:ext uri="{FF2B5EF4-FFF2-40B4-BE49-F238E27FC236}">
-                <a16:creationId xmlns:a16="http://schemas.microsoft.com/office/drawing/2014/main" id="{6ED5648B-77D1-4210-94FA-A0B71D3BE02F}"/>
+                <a16:creationId xmlns:a16="http://schemas.microsoft.com/office/drawing/2014/main" id="{3A1515BA-B913-4F50-B4E8-F30343D8CF90}"/>
               </a:ext>
             </a:extLst>
           </p:cNvPr>
@@ -4642,7 +4642,7 @@
           <p:cNvPr id="7" name="">
             <a:extLst xmlns:a="http://schemas.openxmlformats.org/drawingml/2006/main">
               <a:ext uri="{FF2B5EF4-FFF2-40B4-BE49-F238E27FC236}">
-                <a16:creationId xmlns:a16="http://schemas.microsoft.com/office/drawing/2014/main" id="{F3C2838F-325F-477A-831D-565C81031EDE}"/>
+                <a16:creationId xmlns:a16="http://schemas.microsoft.com/office/drawing/2014/main" id="{299B40F3-8612-475B-B96F-6F5C2931D14C}"/>
               </a:ext>
             </a:extLst>
           </p:cNvPr>
@@ -4674,7 +4674,7 @@
           <p:cNvPr id="8" name="">
             <a:extLst xmlns:a="http://schemas.openxmlformats.org/drawingml/2006/main">
               <a:ext uri="{FF2B5EF4-FFF2-40B4-BE49-F238E27FC236}">
-                <a16:creationId xmlns:a16="http://schemas.microsoft.com/office/drawing/2014/main" id="{BBD173DF-AF4A-47B3-B610-0B360E4BAAFD}"/>
+                <a16:creationId xmlns:a16="http://schemas.microsoft.com/office/drawing/2014/main" id="{6E6FFE25-AC7A-43EE-8129-836E51B62A62}"/>
               </a:ext>
             </a:extLst>
           </p:cNvPr>
@@ -4731,7 +4731,7 @@
           <p:cNvPr id="9" name="">
             <a:extLst xmlns:a="http://schemas.openxmlformats.org/drawingml/2006/main">
               <a:ext uri="{FF2B5EF4-FFF2-40B4-BE49-F238E27FC236}">
-                <a16:creationId xmlns:a16="http://schemas.microsoft.com/office/drawing/2014/main" id="{3D9F9ED3-431B-4090-ABEC-7498C99D04A3}"/>
+                <a16:creationId xmlns:a16="http://schemas.microsoft.com/office/drawing/2014/main" id="{5633492B-7FB8-490E-924B-3B30A2A51C8B}"/>
               </a:ext>
             </a:extLst>
           </p:cNvPr>
@@ -4788,7 +4788,7 @@
           <p:cNvPr id="10" name="">
             <a:extLst xmlns:a="http://schemas.openxmlformats.org/drawingml/2006/main">
               <a:ext uri="{FF2B5EF4-FFF2-40B4-BE49-F238E27FC236}">
-                <a16:creationId xmlns:a16="http://schemas.microsoft.com/office/drawing/2014/main" id="{FE673089-F32C-4D3E-A0A1-89434D4EB40C}"/>
+                <a16:creationId xmlns:a16="http://schemas.microsoft.com/office/drawing/2014/main" id="{1F574D4E-2DDE-4948-9A3D-B18C5086B4FF}"/>
               </a:ext>
             </a:extLst>
           </p:cNvPr>
@@ -4822,7 +4822,7 @@
           <p:cNvPr id="11" name="">
             <a:extLst xmlns:a="http://schemas.openxmlformats.org/drawingml/2006/main">
               <a:ext uri="{FF2B5EF4-FFF2-40B4-BE49-F238E27FC236}">
-                <a16:creationId xmlns:a16="http://schemas.microsoft.com/office/drawing/2014/main" id="{42EF28F8-6414-4B46-9C96-125B85BF6EE9}"/>
+                <a16:creationId xmlns:a16="http://schemas.microsoft.com/office/drawing/2014/main" id="{E232C8A2-ED2F-4E1C-9529-DE29C0384477}"/>
               </a:ext>
             </a:extLst>
           </p:cNvPr>
@@ -4854,7 +4854,7 @@
           <p:cNvPr id="12" name="">
             <a:extLst xmlns:a="http://schemas.openxmlformats.org/drawingml/2006/main">
               <a:ext uri="{FF2B5EF4-FFF2-40B4-BE49-F238E27FC236}">
-                <a16:creationId xmlns:a16="http://schemas.microsoft.com/office/drawing/2014/main" id="{B1889740-9CB2-4C89-BD68-A92FC477AB71}"/>
+                <a16:creationId xmlns:a16="http://schemas.microsoft.com/office/drawing/2014/main" id="{7AC1CC09-0D37-4FEB-8B72-1C84851C6A8E}"/>
               </a:ext>
             </a:extLst>
           </p:cNvPr>
@@ -4911,7 +4911,7 @@
           <p:cNvPr id="13" name="">
             <a:extLst xmlns:a="http://schemas.openxmlformats.org/drawingml/2006/main">
               <a:ext uri="{FF2B5EF4-FFF2-40B4-BE49-F238E27FC236}">
-                <a16:creationId xmlns:a16="http://schemas.microsoft.com/office/drawing/2014/main" id="{BE3C3727-520C-4738-8D7A-A4AEFC6C8D4B}"/>
+                <a16:creationId xmlns:a16="http://schemas.microsoft.com/office/drawing/2014/main" id="{7F16B525-0465-490B-BD22-F3ED8628C36D}"/>
               </a:ext>
             </a:extLst>
           </p:cNvPr>
@@ -4968,7 +4968,7 @@
           <p:cNvPr id="14" name="">
             <a:extLst xmlns:a="http://schemas.openxmlformats.org/drawingml/2006/main">
               <a:ext uri="{FF2B5EF4-FFF2-40B4-BE49-F238E27FC236}">
-                <a16:creationId xmlns:a16="http://schemas.microsoft.com/office/drawing/2014/main" id="{02A823BD-BF23-4131-9454-FD21531FDC64}"/>
+                <a16:creationId xmlns:a16="http://schemas.microsoft.com/office/drawing/2014/main" id="{5B493CFD-F2C9-499C-93FB-671D09142DBA}"/>
               </a:ext>
             </a:extLst>
           </p:cNvPr>
@@ -5002,7 +5002,7 @@
           <p:cNvPr id="15" name="">
             <a:extLst xmlns:a="http://schemas.openxmlformats.org/drawingml/2006/main">
               <a:ext uri="{FF2B5EF4-FFF2-40B4-BE49-F238E27FC236}">
-                <a16:creationId xmlns:a16="http://schemas.microsoft.com/office/drawing/2014/main" id="{E85AEB1F-2E9A-4158-8A81-517D009AECF6}"/>
+                <a16:creationId xmlns:a16="http://schemas.microsoft.com/office/drawing/2014/main" id="{901D2DCF-E60C-4AA8-817F-EC3BC0458296}"/>
               </a:ext>
             </a:extLst>
           </p:cNvPr>
@@ -5034,7 +5034,7 @@
           <p:cNvPr id="16" name="">
             <a:extLst xmlns:a="http://schemas.openxmlformats.org/drawingml/2006/main">
               <a:ext uri="{FF2B5EF4-FFF2-40B4-BE49-F238E27FC236}">
-                <a16:creationId xmlns:a16="http://schemas.microsoft.com/office/drawing/2014/main" id="{A832D48E-BA91-4B2A-B54D-1CFE5152FA1D}"/>
+                <a16:creationId xmlns:a16="http://schemas.microsoft.com/office/drawing/2014/main" id="{0152B7D7-8FDD-4C92-8594-CC197A8B534A}"/>
               </a:ext>
             </a:extLst>
           </p:cNvPr>
@@ -5091,7 +5091,7 @@
           <p:cNvPr id="17" name="">
             <a:extLst xmlns:a="http://schemas.openxmlformats.org/drawingml/2006/main">
               <a:ext uri="{FF2B5EF4-FFF2-40B4-BE49-F238E27FC236}">
-                <a16:creationId xmlns:a16="http://schemas.microsoft.com/office/drawing/2014/main" id="{AC7BCADD-D59B-4FFB-8BD3-01949D767289}"/>
+                <a16:creationId xmlns:a16="http://schemas.microsoft.com/office/drawing/2014/main" id="{7C41C5D3-6D6E-4A10-878A-B9B2BEE0B396}"/>
               </a:ext>
             </a:extLst>
           </p:cNvPr>
@@ -5148,7 +5148,7 @@
           <p:cNvPr id="18" name="">
             <a:extLst xmlns:a="http://schemas.openxmlformats.org/drawingml/2006/main">
               <a:ext uri="{FF2B5EF4-FFF2-40B4-BE49-F238E27FC236}">
-                <a16:creationId xmlns:a16="http://schemas.microsoft.com/office/drawing/2014/main" id="{5F78F570-44DE-49F4-936E-B9EFB5159FD8}"/>
+                <a16:creationId xmlns:a16="http://schemas.microsoft.com/office/drawing/2014/main" id="{FB1651C9-240F-4E93-8471-B8E76C14F266}"/>
               </a:ext>
             </a:extLst>
           </p:cNvPr>
@@ -5182,7 +5182,7 @@
           <p:cNvPr id="19" name="">
             <a:extLst xmlns:a="http://schemas.openxmlformats.org/drawingml/2006/main">
               <a:ext uri="{FF2B5EF4-FFF2-40B4-BE49-F238E27FC236}">
-                <a16:creationId xmlns:a16="http://schemas.microsoft.com/office/drawing/2014/main" id="{1D98D59F-CC06-47E8-A8A3-9FB3733FD862}"/>
+                <a16:creationId xmlns:a16="http://schemas.microsoft.com/office/drawing/2014/main" id="{CD7BBCC4-6365-414E-8F6E-BD7DD4805FE8}"/>
               </a:ext>
             </a:extLst>
           </p:cNvPr>
@@ -5214,7 +5214,7 @@
           <p:cNvPr id="20" name="">
             <a:extLst xmlns:a="http://schemas.openxmlformats.org/drawingml/2006/main">
               <a:ext uri="{FF2B5EF4-FFF2-40B4-BE49-F238E27FC236}">
-                <a16:creationId xmlns:a16="http://schemas.microsoft.com/office/drawing/2014/main" id="{2D9EF3D1-0D6E-4858-9AB5-4CDEDA962012}"/>
+                <a16:creationId xmlns:a16="http://schemas.microsoft.com/office/drawing/2014/main" id="{D8142793-692A-4629-9B07-F3DA02AE501D}"/>
               </a:ext>
             </a:extLst>
           </p:cNvPr>
@@ -5271,7 +5271,7 @@
           <p:cNvPr id="21" name="">
             <a:extLst xmlns:a="http://schemas.openxmlformats.org/drawingml/2006/main">
               <a:ext uri="{FF2B5EF4-FFF2-40B4-BE49-F238E27FC236}">
-                <a16:creationId xmlns:a16="http://schemas.microsoft.com/office/drawing/2014/main" id="{FD94E889-77D7-44BF-A7DA-4611BADACA2E}"/>
+                <a16:creationId xmlns:a16="http://schemas.microsoft.com/office/drawing/2014/main" id="{E206CC09-DC96-4A01-A3E3-F0D8BEC3C95F}"/>
               </a:ext>
             </a:extLst>
           </p:cNvPr>
@@ -5328,7 +5328,7 @@
           <p:cNvPr id="22" name="">
             <a:extLst xmlns:a="http://schemas.openxmlformats.org/drawingml/2006/main">
               <a:ext uri="{FF2B5EF4-FFF2-40B4-BE49-F238E27FC236}">
-                <a16:creationId xmlns:a16="http://schemas.microsoft.com/office/drawing/2014/main" id="{CCD296BA-C8C1-4951-80F8-9F927C515BE9}"/>
+                <a16:creationId xmlns:a16="http://schemas.microsoft.com/office/drawing/2014/main" id="{7E6A007F-3D70-44B5-A6B4-661A54A38D82}"/>
               </a:ext>
             </a:extLst>
           </p:cNvPr>
@@ -5383,7 +5383,7 @@
     </p:spTree>
     <p:extLst>
       <p:ext uri="{BB962C8B-B14F-4D97-AF65-F5344CB8AC3E}">
-        <p14:creationId xmlns:p14="http://schemas.microsoft.com/office/powerpoint/2010/main" val="112120071"/>
+        <p14:creationId xmlns:p14="http://schemas.microsoft.com/office/powerpoint/2010/main" val="2146481963"/>
       </p:ext>
     </p:extLst>
   </p:cSld>
@@ -5584,7 +5584,7 @@
           <p:cNvPr id="23" name="">
             <a:extLst xmlns:a="http://schemas.openxmlformats.org/drawingml/2006/main">
               <a:ext uri="{FF2B5EF4-FFF2-40B4-BE49-F238E27FC236}">
-                <a16:creationId xmlns:a16="http://schemas.microsoft.com/office/drawing/2014/main" id="{ACA6C3D1-C90A-441D-A586-2E8A8238AB2E}"/>
+                <a16:creationId xmlns:a16="http://schemas.microsoft.com/office/drawing/2014/main" id="{F4145F4B-8712-4DA3-8C7B-B24CABF12059}"/>
               </a:ext>
             </a:extLst>
           </p:cNvPr>
@@ -5616,7 +5616,7 @@
           <p:cNvPr id="2" name="">
             <a:extLst xmlns:a="http://schemas.openxmlformats.org/drawingml/2006/main">
               <a:ext uri="{FF2B5EF4-FFF2-40B4-BE49-F238E27FC236}">
-                <a16:creationId xmlns:a16="http://schemas.microsoft.com/office/drawing/2014/main" id="{360DD94F-EC5F-4B38-8E12-739B03C4C639}"/>
+                <a16:creationId xmlns:a16="http://schemas.microsoft.com/office/drawing/2014/main" id="{66D606B5-C7E2-4AC1-AC7E-E5E395D46C1F}"/>
               </a:ext>
             </a:extLst>
           </p:cNvPr>
@@ -5673,7 +5673,7 @@
           <p:cNvPr id="3" name="">
             <a:extLst xmlns:a="http://schemas.openxmlformats.org/drawingml/2006/main">
               <a:ext uri="{FF2B5EF4-FFF2-40B4-BE49-F238E27FC236}">
-                <a16:creationId xmlns:a16="http://schemas.microsoft.com/office/drawing/2014/main" id="{DAA2EFA0-96F5-4F55-9387-669FF4BAA4A9}"/>
+                <a16:creationId xmlns:a16="http://schemas.microsoft.com/office/drawing/2014/main" id="{B83DEABB-306E-48D4-9771-16F7DCC100BB}"/>
               </a:ext>
             </a:extLst>
           </p:cNvPr>
@@ -5705,7 +5705,7 @@
           <p:cNvPr id="4" name="">
             <a:extLst xmlns:a="http://schemas.openxmlformats.org/drawingml/2006/main">
               <a:ext uri="{FF2B5EF4-FFF2-40B4-BE49-F238E27FC236}">
-                <a16:creationId xmlns:a16="http://schemas.microsoft.com/office/drawing/2014/main" id="{15991B5B-B713-49C9-A6BF-69F6838DCC21}"/>
+                <a16:creationId xmlns:a16="http://schemas.microsoft.com/office/drawing/2014/main" id="{07A324F9-5A26-488E-8C3A-B5D9AF6F9242}"/>
               </a:ext>
             </a:extLst>
           </p:cNvPr>
@@ -5762,7 +5762,7 @@
           <p:cNvPr id="5" name="">
             <a:extLst xmlns:a="http://schemas.openxmlformats.org/drawingml/2006/main">
               <a:ext uri="{FF2B5EF4-FFF2-40B4-BE49-F238E27FC236}">
-                <a16:creationId xmlns:a16="http://schemas.microsoft.com/office/drawing/2014/main" id="{9D94E93E-F64A-4DCD-8288-AF0C5511FE3E}"/>
+                <a16:creationId xmlns:a16="http://schemas.microsoft.com/office/drawing/2014/main" id="{168B839F-3CCC-41AA-B5AC-DDC7EB933B32}"/>
               </a:ext>
             </a:extLst>
           </p:cNvPr>
@@ -5819,7 +5819,7 @@
           <p:cNvPr id="6" name="">
             <a:extLst xmlns:a="http://schemas.openxmlformats.org/drawingml/2006/main">
               <a:ext uri="{FF2B5EF4-FFF2-40B4-BE49-F238E27FC236}">
-                <a16:creationId xmlns:a16="http://schemas.microsoft.com/office/drawing/2014/main" id="{0671B9D0-FB2E-47BB-9F0F-BA9DE178490E}"/>
+                <a16:creationId xmlns:a16="http://schemas.microsoft.com/office/drawing/2014/main" id="{B0DB8200-DBD8-46AA-BF4C-ADF9EF39A653}"/>
               </a:ext>
             </a:extLst>
           </p:cNvPr>
@@ -5876,7 +5876,7 @@
           <p:cNvPr id="7" name="">
             <a:extLst xmlns:a="http://schemas.openxmlformats.org/drawingml/2006/main">
               <a:ext uri="{FF2B5EF4-FFF2-40B4-BE49-F238E27FC236}">
-                <a16:creationId xmlns:a16="http://schemas.microsoft.com/office/drawing/2014/main" id="{22B3442E-10F1-412B-846B-921246750F20}"/>
+                <a16:creationId xmlns:a16="http://schemas.microsoft.com/office/drawing/2014/main" id="{B872E36C-609D-4CD0-8ACC-0D6B8855ADF4}"/>
               </a:ext>
             </a:extLst>
           </p:cNvPr>
@@ -5908,7 +5908,7 @@
           <p:cNvPr id="8" name="">
             <a:extLst xmlns:a="http://schemas.openxmlformats.org/drawingml/2006/main">
               <a:ext uri="{FF2B5EF4-FFF2-40B4-BE49-F238E27FC236}">
-                <a16:creationId xmlns:a16="http://schemas.microsoft.com/office/drawing/2014/main" id="{AAA9755A-7FC1-44C6-9606-1EEB1FEBD9A5}"/>
+                <a16:creationId xmlns:a16="http://schemas.microsoft.com/office/drawing/2014/main" id="{9896A604-F9FA-483D-894D-D78776A0A252}"/>
               </a:ext>
             </a:extLst>
           </p:cNvPr>
@@ -5965,7 +5965,7 @@
           <p:cNvPr id="9" name="">
             <a:extLst xmlns:a="http://schemas.openxmlformats.org/drawingml/2006/main">
               <a:ext uri="{FF2B5EF4-FFF2-40B4-BE49-F238E27FC236}">
-                <a16:creationId xmlns:a16="http://schemas.microsoft.com/office/drawing/2014/main" id="{BB8CB4CA-8C7A-45D8-A382-489AAE35ED1E}"/>
+                <a16:creationId xmlns:a16="http://schemas.microsoft.com/office/drawing/2014/main" id="{8E716EA1-E9C0-4362-B6AB-0FF14E2E1232}"/>
               </a:ext>
             </a:extLst>
           </p:cNvPr>
@@ -6022,7 +6022,7 @@
           <p:cNvPr id="10" name="">
             <a:extLst xmlns:a="http://schemas.openxmlformats.org/drawingml/2006/main">
               <a:ext uri="{FF2B5EF4-FFF2-40B4-BE49-F238E27FC236}">
-                <a16:creationId xmlns:a16="http://schemas.microsoft.com/office/drawing/2014/main" id="{87BEB4EA-7EAE-43B3-B323-C7AB1011CEFC}"/>
+                <a16:creationId xmlns:a16="http://schemas.microsoft.com/office/drawing/2014/main" id="{2B036667-E6DE-47BA-A689-1D06A4EE5827}"/>
               </a:ext>
             </a:extLst>
           </p:cNvPr>
@@ -6056,7 +6056,7 @@
           <p:cNvPr id="11" name="">
             <a:extLst xmlns:a="http://schemas.openxmlformats.org/drawingml/2006/main">
               <a:ext uri="{FF2B5EF4-FFF2-40B4-BE49-F238E27FC236}">
-                <a16:creationId xmlns:a16="http://schemas.microsoft.com/office/drawing/2014/main" id="{9FEAA977-00C4-4DFF-9F83-13AE6541915A}"/>
+                <a16:creationId xmlns:a16="http://schemas.microsoft.com/office/drawing/2014/main" id="{12BE0486-B312-4265-8647-A37ABD909EC9}"/>
               </a:ext>
             </a:extLst>
           </p:cNvPr>
@@ -6088,7 +6088,7 @@
           <p:cNvPr id="12" name="">
             <a:extLst xmlns:a="http://schemas.openxmlformats.org/drawingml/2006/main">
               <a:ext uri="{FF2B5EF4-FFF2-40B4-BE49-F238E27FC236}">
-                <a16:creationId xmlns:a16="http://schemas.microsoft.com/office/drawing/2014/main" id="{8EEB7B7A-3C7C-477B-8D3E-AB12DC6AC5DE}"/>
+                <a16:creationId xmlns:a16="http://schemas.microsoft.com/office/drawing/2014/main" id="{22A162C9-6C6D-4F37-B45C-F53BD30EF172}"/>
               </a:ext>
             </a:extLst>
           </p:cNvPr>
@@ -6145,7 +6145,7 @@
           <p:cNvPr id="13" name="">
             <a:extLst xmlns:a="http://schemas.openxmlformats.org/drawingml/2006/main">
               <a:ext uri="{FF2B5EF4-FFF2-40B4-BE49-F238E27FC236}">
-                <a16:creationId xmlns:a16="http://schemas.microsoft.com/office/drawing/2014/main" id="{5362AA97-1F62-4EC5-98E7-AFD5A27F0431}"/>
+                <a16:creationId xmlns:a16="http://schemas.microsoft.com/office/drawing/2014/main" id="{E963495F-358B-4B93-B980-88A726A2A09E}"/>
               </a:ext>
             </a:extLst>
           </p:cNvPr>
@@ -6202,7 +6202,7 @@
           <p:cNvPr id="14" name="">
             <a:extLst xmlns:a="http://schemas.openxmlformats.org/drawingml/2006/main">
               <a:ext uri="{FF2B5EF4-FFF2-40B4-BE49-F238E27FC236}">
-                <a16:creationId xmlns:a16="http://schemas.microsoft.com/office/drawing/2014/main" id="{54B5B919-1F1E-4E02-8879-6696BD789B77}"/>
+                <a16:creationId xmlns:a16="http://schemas.microsoft.com/office/drawing/2014/main" id="{50323555-FBC2-43D8-8CB9-771BF0343C4C}"/>
               </a:ext>
             </a:extLst>
           </p:cNvPr>
@@ -6236,7 +6236,7 @@
           <p:cNvPr id="15" name="">
             <a:extLst xmlns:a="http://schemas.openxmlformats.org/drawingml/2006/main">
               <a:ext uri="{FF2B5EF4-FFF2-40B4-BE49-F238E27FC236}">
-                <a16:creationId xmlns:a16="http://schemas.microsoft.com/office/drawing/2014/main" id="{706B8780-5B8D-4126-A8E8-974FDAC1D9A6}"/>
+                <a16:creationId xmlns:a16="http://schemas.microsoft.com/office/drawing/2014/main" id="{F66847E7-7FD9-4B7D-8C53-8BCE1FD7FCFD}"/>
               </a:ext>
             </a:extLst>
           </p:cNvPr>
@@ -6268,7 +6268,7 @@
           <p:cNvPr id="16" name="">
             <a:extLst xmlns:a="http://schemas.openxmlformats.org/drawingml/2006/main">
               <a:ext uri="{FF2B5EF4-FFF2-40B4-BE49-F238E27FC236}">
-                <a16:creationId xmlns:a16="http://schemas.microsoft.com/office/drawing/2014/main" id="{551B9071-C426-4D09-925B-D137317FAC0A}"/>
+                <a16:creationId xmlns:a16="http://schemas.microsoft.com/office/drawing/2014/main" id="{3CD687CB-8B3B-49F8-9C3E-790BEFCAE83F}"/>
               </a:ext>
             </a:extLst>
           </p:cNvPr>
@@ -6325,7 +6325,7 @@
           <p:cNvPr id="17" name="">
             <a:extLst xmlns:a="http://schemas.openxmlformats.org/drawingml/2006/main">
               <a:ext uri="{FF2B5EF4-FFF2-40B4-BE49-F238E27FC236}">
-                <a16:creationId xmlns:a16="http://schemas.microsoft.com/office/drawing/2014/main" id="{6066EED8-2A95-47BA-89DC-626FFDF2C54F}"/>
+                <a16:creationId xmlns:a16="http://schemas.microsoft.com/office/drawing/2014/main" id="{91848846-CB9A-448B-A7C9-DCAFAB351C29}"/>
               </a:ext>
             </a:extLst>
           </p:cNvPr>
@@ -6382,7 +6382,7 @@
           <p:cNvPr id="18" name="">
             <a:extLst xmlns:a="http://schemas.openxmlformats.org/drawingml/2006/main">
               <a:ext uri="{FF2B5EF4-FFF2-40B4-BE49-F238E27FC236}">
-                <a16:creationId xmlns:a16="http://schemas.microsoft.com/office/drawing/2014/main" id="{B446A26B-D469-4029-BFA8-83010DCBC9AF}"/>
+                <a16:creationId xmlns:a16="http://schemas.microsoft.com/office/drawing/2014/main" id="{A5C4FE52-5CCE-4D9F-B863-5CD3772CE09D}"/>
               </a:ext>
             </a:extLst>
           </p:cNvPr>
@@ -6416,7 +6416,7 @@
           <p:cNvPr id="19" name="">
             <a:extLst xmlns:a="http://schemas.openxmlformats.org/drawingml/2006/main">
               <a:ext uri="{FF2B5EF4-FFF2-40B4-BE49-F238E27FC236}">
-                <a16:creationId xmlns:a16="http://schemas.microsoft.com/office/drawing/2014/main" id="{6ADC88E1-D27B-4410-938A-9CD8EC4C028E}"/>
+                <a16:creationId xmlns:a16="http://schemas.microsoft.com/office/drawing/2014/main" id="{04D8DBEA-09F8-4314-B5FC-E7B0DA34F762}"/>
               </a:ext>
             </a:extLst>
           </p:cNvPr>
@@ -6448,7 +6448,7 @@
           <p:cNvPr id="20" name="">
             <a:extLst xmlns:a="http://schemas.openxmlformats.org/drawingml/2006/main">
               <a:ext uri="{FF2B5EF4-FFF2-40B4-BE49-F238E27FC236}">
-                <a16:creationId xmlns:a16="http://schemas.microsoft.com/office/drawing/2014/main" id="{603C3D70-302F-4904-92F3-D3D15D3ED3A0}"/>
+                <a16:creationId xmlns:a16="http://schemas.microsoft.com/office/drawing/2014/main" id="{9B07A1BD-5103-4105-B161-CEACBFF9AE77}"/>
               </a:ext>
             </a:extLst>
           </p:cNvPr>
@@ -6505,7 +6505,7 @@
           <p:cNvPr id="21" name="">
             <a:extLst xmlns:a="http://schemas.openxmlformats.org/drawingml/2006/main">
               <a:ext uri="{FF2B5EF4-FFF2-40B4-BE49-F238E27FC236}">
-                <a16:creationId xmlns:a16="http://schemas.microsoft.com/office/drawing/2014/main" id="{CD63159C-B91C-46A1-A382-D5664DE02150}"/>
+                <a16:creationId xmlns:a16="http://schemas.microsoft.com/office/drawing/2014/main" id="{4DAE2C22-40FB-4F6D-A056-52AA2DAF2D83}"/>
               </a:ext>
             </a:extLst>
           </p:cNvPr>
@@ -6562,7 +6562,7 @@
           <p:cNvPr id="22" name="">
             <a:extLst xmlns:a="http://schemas.openxmlformats.org/drawingml/2006/main">
               <a:ext uri="{FF2B5EF4-FFF2-40B4-BE49-F238E27FC236}">
-                <a16:creationId xmlns:a16="http://schemas.microsoft.com/office/drawing/2014/main" id="{95337729-2915-48E8-8F68-1EE2B614CDA1}"/>
+                <a16:creationId xmlns:a16="http://schemas.microsoft.com/office/drawing/2014/main" id="{54E85B1B-EEB6-42AD-B2B8-9C8D9DCE4946}"/>
               </a:ext>
             </a:extLst>
           </p:cNvPr>
@@ -6617,7 +6617,7 @@
     </p:spTree>
     <p:extLst>
       <p:ext uri="{BB962C8B-B14F-4D97-AF65-F5344CB8AC3E}">
-        <p14:creationId xmlns:p14="http://schemas.microsoft.com/office/powerpoint/2010/main" val="1482549090"/>
+        <p14:creationId xmlns:p14="http://schemas.microsoft.com/office/powerpoint/2010/main" val="743924974"/>
       </p:ext>
     </p:extLst>
   </p:cSld>
@@ -6818,7 +6818,7 @@
           <p:cNvPr id="16" name="">
             <a:extLst xmlns:a="http://schemas.openxmlformats.org/drawingml/2006/main">
               <a:ext uri="{FF2B5EF4-FFF2-40B4-BE49-F238E27FC236}">
-                <a16:creationId xmlns:a16="http://schemas.microsoft.com/office/drawing/2014/main" id="{7798EE08-74AA-4AD5-806B-B8E896073CD9}"/>
+                <a16:creationId xmlns:a16="http://schemas.microsoft.com/office/drawing/2014/main" id="{6DFF5C00-913D-4513-97A6-8C2D2EEDF934}"/>
               </a:ext>
             </a:extLst>
           </p:cNvPr>
@@ -6850,7 +6850,7 @@
           <p:cNvPr id="2" name="">
             <a:extLst xmlns:a="http://schemas.openxmlformats.org/drawingml/2006/main">
               <a:ext uri="{FF2B5EF4-FFF2-40B4-BE49-F238E27FC236}">
-                <a16:creationId xmlns:a16="http://schemas.microsoft.com/office/drawing/2014/main" id="{0EADD904-3D6F-4FDF-8638-7BA847D91840}"/>
+                <a16:creationId xmlns:a16="http://schemas.microsoft.com/office/drawing/2014/main" id="{D0B25470-BA34-4826-8ACE-7F32C699AE8C}"/>
               </a:ext>
             </a:extLst>
           </p:cNvPr>
@@ -6907,7 +6907,7 @@
           <p:cNvPr id="3" name="">
             <a:extLst xmlns:a="http://schemas.openxmlformats.org/drawingml/2006/main">
               <a:ext uri="{FF2B5EF4-FFF2-40B4-BE49-F238E27FC236}">
-                <a16:creationId xmlns:a16="http://schemas.microsoft.com/office/drawing/2014/main" id="{AFC451E4-BE24-4384-9F24-7BD1BFA6B006}"/>
+                <a16:creationId xmlns:a16="http://schemas.microsoft.com/office/drawing/2014/main" id="{04DD2F86-F594-402A-94A3-3509DAD5BB22}"/>
               </a:ext>
             </a:extLst>
           </p:cNvPr>
@@ -6939,7 +6939,7 @@
           <p:cNvPr id="4" name="">
             <a:extLst xmlns:a="http://schemas.openxmlformats.org/drawingml/2006/main">
               <a:ext uri="{FF2B5EF4-FFF2-40B4-BE49-F238E27FC236}">
-                <a16:creationId xmlns:a16="http://schemas.microsoft.com/office/drawing/2014/main" id="{D3CF5D48-ABB1-48DF-9455-9A2A4C56161D}"/>
+                <a16:creationId xmlns:a16="http://schemas.microsoft.com/office/drawing/2014/main" id="{A85FCCDF-7FE9-49D4-8121-71D264A134EB}"/>
               </a:ext>
             </a:extLst>
           </p:cNvPr>
@@ -6996,7 +6996,7 @@
           <p:cNvPr id="5" name="">
             <a:extLst xmlns:a="http://schemas.openxmlformats.org/drawingml/2006/main">
               <a:ext uri="{FF2B5EF4-FFF2-40B4-BE49-F238E27FC236}">
-                <a16:creationId xmlns:a16="http://schemas.microsoft.com/office/drawing/2014/main" id="{CD6E51DB-A2C1-4FE8-BB9E-58E2EE64ECF5}"/>
+                <a16:creationId xmlns:a16="http://schemas.microsoft.com/office/drawing/2014/main" id="{F56892E8-A6D7-4E45-BDD2-EECCA108001C}"/>
               </a:ext>
             </a:extLst>
           </p:cNvPr>
@@ -7053,7 +7053,7 @@
           <p:cNvPr id="6" name="">
             <a:extLst xmlns:a="http://schemas.openxmlformats.org/drawingml/2006/main">
               <a:ext uri="{FF2B5EF4-FFF2-40B4-BE49-F238E27FC236}">
-                <a16:creationId xmlns:a16="http://schemas.microsoft.com/office/drawing/2014/main" id="{8D6C9897-E286-4C8A-82F1-FFEC286AAC1C}"/>
+                <a16:creationId xmlns:a16="http://schemas.microsoft.com/office/drawing/2014/main" id="{52EF5B95-8182-415C-863F-C4B5955626BA}"/>
               </a:ext>
             </a:extLst>
           </p:cNvPr>
@@ -7110,7 +7110,7 @@
           <p:cNvPr id="7" name="">
             <a:extLst xmlns:a="http://schemas.openxmlformats.org/drawingml/2006/main">
               <a:ext uri="{FF2B5EF4-FFF2-40B4-BE49-F238E27FC236}">
-                <a16:creationId xmlns:a16="http://schemas.microsoft.com/office/drawing/2014/main" id="{253A6366-DA02-4B72-B7BF-18991C1CAAC5}"/>
+                <a16:creationId xmlns:a16="http://schemas.microsoft.com/office/drawing/2014/main" id="{78797074-3FC8-4092-9368-4EC0450D1218}"/>
               </a:ext>
             </a:extLst>
           </p:cNvPr>
@@ -7142,7 +7142,7 @@
           <p:cNvPr id="8" name="">
             <a:extLst xmlns:a="http://schemas.openxmlformats.org/drawingml/2006/main">
               <a:ext uri="{FF2B5EF4-FFF2-40B4-BE49-F238E27FC236}">
-                <a16:creationId xmlns:a16="http://schemas.microsoft.com/office/drawing/2014/main" id="{343E90D2-C516-417F-92F6-C45AB2C30C96}"/>
+                <a16:creationId xmlns:a16="http://schemas.microsoft.com/office/drawing/2014/main" id="{9BF90F14-10BB-4A17-A81A-3D110B371F11}"/>
               </a:ext>
             </a:extLst>
           </p:cNvPr>
@@ -7199,7 +7199,7 @@
           <p:cNvPr id="9" name="">
             <a:extLst xmlns:a="http://schemas.openxmlformats.org/drawingml/2006/main">
               <a:ext uri="{FF2B5EF4-FFF2-40B4-BE49-F238E27FC236}">
-                <a16:creationId xmlns:a16="http://schemas.microsoft.com/office/drawing/2014/main" id="{799BE10E-0173-46FE-A3AB-4F1A5C82F304}"/>
+                <a16:creationId xmlns:a16="http://schemas.microsoft.com/office/drawing/2014/main" id="{9213FCAC-36AA-4859-A2B1-0CE4CC50F340}"/>
               </a:ext>
             </a:extLst>
           </p:cNvPr>
@@ -7256,7 +7256,7 @@
           <p:cNvPr id="10" name="">
             <a:extLst xmlns:a="http://schemas.openxmlformats.org/drawingml/2006/main">
               <a:ext uri="{FF2B5EF4-FFF2-40B4-BE49-F238E27FC236}">
-                <a16:creationId xmlns:a16="http://schemas.microsoft.com/office/drawing/2014/main" id="{B7BF256C-7B59-4483-8C2D-3F9377CB8F71}"/>
+                <a16:creationId xmlns:a16="http://schemas.microsoft.com/office/drawing/2014/main" id="{99948070-7C45-4DB4-AB1F-423859ECDEE4}"/>
               </a:ext>
             </a:extLst>
           </p:cNvPr>
@@ -7313,7 +7313,7 @@
           <p:cNvPr id="11" name="">
             <a:extLst xmlns:a="http://schemas.openxmlformats.org/drawingml/2006/main">
               <a:ext uri="{FF2B5EF4-FFF2-40B4-BE49-F238E27FC236}">
-                <a16:creationId xmlns:a16="http://schemas.microsoft.com/office/drawing/2014/main" id="{88C284A3-CB27-4810-B218-65FBB8CBF85B}"/>
+                <a16:creationId xmlns:a16="http://schemas.microsoft.com/office/drawing/2014/main" id="{F7674C85-31A9-4F8F-B75F-15BDD02C0A98}"/>
               </a:ext>
             </a:extLst>
           </p:cNvPr>
@@ -7345,7 +7345,7 @@
           <p:cNvPr id="12" name="">
             <a:extLst xmlns:a="http://schemas.openxmlformats.org/drawingml/2006/main">
               <a:ext uri="{FF2B5EF4-FFF2-40B4-BE49-F238E27FC236}">
-                <a16:creationId xmlns:a16="http://schemas.microsoft.com/office/drawing/2014/main" id="{9A40565C-CB5E-4B01-90FA-BE2501E29754}"/>
+                <a16:creationId xmlns:a16="http://schemas.microsoft.com/office/drawing/2014/main" id="{03D048D9-C259-4B0F-92B9-8FBC19C430D4}"/>
               </a:ext>
             </a:extLst>
           </p:cNvPr>
@@ -7402,7 +7402,7 @@
           <p:cNvPr id="13" name="">
             <a:extLst xmlns:a="http://schemas.openxmlformats.org/drawingml/2006/main">
               <a:ext uri="{FF2B5EF4-FFF2-40B4-BE49-F238E27FC236}">
-                <a16:creationId xmlns:a16="http://schemas.microsoft.com/office/drawing/2014/main" id="{6F41A3C3-60AD-4BD2-9CFB-ABADDF9E6482}"/>
+                <a16:creationId xmlns:a16="http://schemas.microsoft.com/office/drawing/2014/main" id="{A50BCB19-FFC6-47C0-8753-A67906F48D5E}"/>
               </a:ext>
             </a:extLst>
           </p:cNvPr>
@@ -7459,7 +7459,7 @@
           <p:cNvPr id="14" name="">
             <a:extLst xmlns:a="http://schemas.openxmlformats.org/drawingml/2006/main">
               <a:ext uri="{FF2B5EF4-FFF2-40B4-BE49-F238E27FC236}">
-                <a16:creationId xmlns:a16="http://schemas.microsoft.com/office/drawing/2014/main" id="{49DD0680-894D-4B05-A766-A23F5D691F9D}"/>
+                <a16:creationId xmlns:a16="http://schemas.microsoft.com/office/drawing/2014/main" id="{E7EC24E7-9095-488B-85EA-182E2FCDB1BD}"/>
               </a:ext>
             </a:extLst>
           </p:cNvPr>
@@ -7516,7 +7516,7 @@
           <p:cNvPr id="15" name="">
             <a:extLst xmlns:a="http://schemas.openxmlformats.org/drawingml/2006/main">
               <a:ext uri="{FF2B5EF4-FFF2-40B4-BE49-F238E27FC236}">
-                <a16:creationId xmlns:a16="http://schemas.microsoft.com/office/drawing/2014/main" id="{4CD9F459-B1B8-42A8-B15B-D77F45DBCE1C}"/>
+                <a16:creationId xmlns:a16="http://schemas.microsoft.com/office/drawing/2014/main" id="{CA334833-72B7-4572-8770-F8C4B2FCD978}"/>
               </a:ext>
             </a:extLst>
           </p:cNvPr>
@@ -7571,7 +7571,7 @@
     </p:spTree>
     <p:extLst>
       <p:ext uri="{BB962C8B-B14F-4D97-AF65-F5344CB8AC3E}">
-        <p14:creationId xmlns:p14="http://schemas.microsoft.com/office/powerpoint/2010/main" val="2027944663"/>
+        <p14:creationId xmlns:p14="http://schemas.microsoft.com/office/powerpoint/2010/main" val="1833679293"/>
       </p:ext>
     </p:extLst>
   </p:cSld>
@@ -7772,7 +7772,7 @@
           <p:cNvPr id="23" name="">
             <a:extLst xmlns:a="http://schemas.openxmlformats.org/drawingml/2006/main">
               <a:ext uri="{FF2B5EF4-FFF2-40B4-BE49-F238E27FC236}">
-                <a16:creationId xmlns:a16="http://schemas.microsoft.com/office/drawing/2014/main" id="{8733005B-556B-4DF5-BD87-2A1F16ABF983}"/>
+                <a16:creationId xmlns:a16="http://schemas.microsoft.com/office/drawing/2014/main" id="{CE50408F-C7DF-4960-86CC-D358EF68D4BF}"/>
               </a:ext>
             </a:extLst>
           </p:cNvPr>
@@ -7804,7 +7804,7 @@
           <p:cNvPr id="2" name="">
             <a:extLst xmlns:a="http://schemas.openxmlformats.org/drawingml/2006/main">
               <a:ext uri="{FF2B5EF4-FFF2-40B4-BE49-F238E27FC236}">
-                <a16:creationId xmlns:a16="http://schemas.microsoft.com/office/drawing/2014/main" id="{D771418F-30E1-4236-AECD-05A0FC757CFC}"/>
+                <a16:creationId xmlns:a16="http://schemas.microsoft.com/office/drawing/2014/main" id="{C3686CD7-8E75-4685-B6D9-FDFE42188723}"/>
               </a:ext>
             </a:extLst>
           </p:cNvPr>
@@ -7861,7 +7861,7 @@
           <p:cNvPr id="3" name="">
             <a:extLst xmlns:a="http://schemas.openxmlformats.org/drawingml/2006/main">
               <a:ext uri="{FF2B5EF4-FFF2-40B4-BE49-F238E27FC236}">
-                <a16:creationId xmlns:a16="http://schemas.microsoft.com/office/drawing/2014/main" id="{86D73AEB-E0FC-4768-A8C7-C953EDE55DA1}"/>
+                <a16:creationId xmlns:a16="http://schemas.microsoft.com/office/drawing/2014/main" id="{5BF52F75-39FE-480E-874D-C91D7EBBA9FF}"/>
               </a:ext>
             </a:extLst>
           </p:cNvPr>
@@ -7893,7 +7893,7 @@
           <p:cNvPr id="4" name="">
             <a:extLst xmlns:a="http://schemas.openxmlformats.org/drawingml/2006/main">
               <a:ext uri="{FF2B5EF4-FFF2-40B4-BE49-F238E27FC236}">
-                <a16:creationId xmlns:a16="http://schemas.microsoft.com/office/drawing/2014/main" id="{A2DDE79C-FC9E-494A-A0CF-6DDF72CF5928}"/>
+                <a16:creationId xmlns:a16="http://schemas.microsoft.com/office/drawing/2014/main" id="{9DA9E54A-E6BF-4380-953A-05F02A3FE3DB}"/>
               </a:ext>
             </a:extLst>
           </p:cNvPr>
@@ -7950,7 +7950,7 @@
           <p:cNvPr id="5" name="">
             <a:extLst xmlns:a="http://schemas.openxmlformats.org/drawingml/2006/main">
               <a:ext uri="{FF2B5EF4-FFF2-40B4-BE49-F238E27FC236}">
-                <a16:creationId xmlns:a16="http://schemas.microsoft.com/office/drawing/2014/main" id="{68644638-42D6-471E-8277-6DE6734A6E19}"/>
+                <a16:creationId xmlns:a16="http://schemas.microsoft.com/office/drawing/2014/main" id="{EF8A5AE3-85C1-4674-88C7-E4F7A487504C}"/>
               </a:ext>
             </a:extLst>
           </p:cNvPr>
@@ -8007,7 +8007,7 @@
           <p:cNvPr id="6" name="">
             <a:extLst xmlns:a="http://schemas.openxmlformats.org/drawingml/2006/main">
               <a:ext uri="{FF2B5EF4-FFF2-40B4-BE49-F238E27FC236}">
-                <a16:creationId xmlns:a16="http://schemas.microsoft.com/office/drawing/2014/main" id="{6BB1E819-A94F-4F85-81D4-C1E7A76E7C62}"/>
+                <a16:creationId xmlns:a16="http://schemas.microsoft.com/office/drawing/2014/main" id="{B56ADC32-410F-48DB-9F76-F1902B234C96}"/>
               </a:ext>
             </a:extLst>
           </p:cNvPr>
@@ -8064,7 +8064,7 @@
           <p:cNvPr id="7" name="">
             <a:extLst xmlns:a="http://schemas.openxmlformats.org/drawingml/2006/main">
               <a:ext uri="{FF2B5EF4-FFF2-40B4-BE49-F238E27FC236}">
-                <a16:creationId xmlns:a16="http://schemas.microsoft.com/office/drawing/2014/main" id="{02811F8E-C38D-4293-82FD-6EC3FC201BA6}"/>
+                <a16:creationId xmlns:a16="http://schemas.microsoft.com/office/drawing/2014/main" id="{7FCA3BC9-030A-40CA-95D8-34D0BD575A2B}"/>
               </a:ext>
             </a:extLst>
           </p:cNvPr>
@@ -8096,7 +8096,7 @@
           <p:cNvPr id="8" name="">
             <a:extLst xmlns:a="http://schemas.openxmlformats.org/drawingml/2006/main">
               <a:ext uri="{FF2B5EF4-FFF2-40B4-BE49-F238E27FC236}">
-                <a16:creationId xmlns:a16="http://schemas.microsoft.com/office/drawing/2014/main" id="{44C17C04-361D-4073-ABB4-7845ED241FE7}"/>
+                <a16:creationId xmlns:a16="http://schemas.microsoft.com/office/drawing/2014/main" id="{B69F4493-0744-4877-BE8D-94D19DE8B3CD}"/>
               </a:ext>
             </a:extLst>
           </p:cNvPr>
@@ -8153,7 +8153,7 @@
           <p:cNvPr id="9" name="">
             <a:extLst xmlns:a="http://schemas.openxmlformats.org/drawingml/2006/main">
               <a:ext uri="{FF2B5EF4-FFF2-40B4-BE49-F238E27FC236}">
-                <a16:creationId xmlns:a16="http://schemas.microsoft.com/office/drawing/2014/main" id="{A03284B1-FD5A-4F8A-AA8B-8DA861B882D4}"/>
+                <a16:creationId xmlns:a16="http://schemas.microsoft.com/office/drawing/2014/main" id="{07DA59CB-1687-4A36-9D91-0E60E2774028}"/>
               </a:ext>
             </a:extLst>
           </p:cNvPr>
@@ -8210,19 +8210,19 @@
           <p:cNvPr id="10" name="">
             <a:extLst xmlns:a="http://schemas.openxmlformats.org/drawingml/2006/main">
               <a:ext uri="{FF2B5EF4-FFF2-40B4-BE49-F238E27FC236}">
-                <a16:creationId xmlns:a16="http://schemas.microsoft.com/office/drawing/2014/main" id="{55CDB9A2-A3BB-4C0A-AC59-60E7D2B8E1A0}"/>
-              </a:ext>
-            </a:extLst>
-          </p:cNvPr>
-          <p:cNvSpPr>
-            <a:spLocks xmlns:a="http://schemas.openxmlformats.org/drawingml/2006/main" noGrp="1"/>
-          </p:cNvSpPr>
-          <p:nvPr/>
-        </p:nvSpPr>
-        <p:spPr>
-          <a:xfrm xmlns:a="http://schemas.openxmlformats.org/drawingml/2006/main">
-            <a:off x="914400" y="1257300"/>
-            <a:ext cx="10363200" cy="781050"/>
+                <a16:creationId xmlns:a16="http://schemas.microsoft.com/office/drawing/2014/main" id="{68DA84DC-1111-463F-88DB-7F8E38F1CCA1}"/>
+              </a:ext>
+            </a:extLst>
+          </p:cNvPr>
+          <p:cNvSpPr>
+            <a:spLocks xmlns:a="http://schemas.openxmlformats.org/drawingml/2006/main" noGrp="1"/>
+          </p:cNvSpPr>
+          <p:nvPr/>
+        </p:nvSpPr>
+        <p:spPr>
+          <a:xfrm xmlns:a="http://schemas.openxmlformats.org/drawingml/2006/main">
+            <a:off x="857250" y="1219200"/>
+            <a:ext cx="10477500" cy="742950"/>
           </a:xfrm>
           <a:prstGeom xmlns:a="http://schemas.openxmlformats.org/drawingml/2006/main" prst="rect">
             <a:avLst/>
@@ -8239,7 +8239,7 @@
           <a:lstStyle xmlns:a="http://schemas.openxmlformats.org/drawingml/2006/main"/>
           <a:p xmlns:a="http://schemas.openxmlformats.org/drawingml/2006/main">
             <a:pPr algn="ctr">
-              <a:defRPr sz="2175" b="1">
+              <a:defRPr sz="2100" b="1">
                 <a:solidFill>
                   <a:srgbClr val="17253A"/>
                 </a:solidFill>
@@ -8249,7 +8249,7 @@
               </a:defRPr>
             </a:pPr>
             <a:r>
-              <a:rPr sz="2175" b="1">
+              <a:rPr sz="2100" b="1">
                 <a:solidFill>
                   <a:srgbClr val="17253A"/>
                 </a:solidFill>
@@ -8267,28 +8267,30 @@
           <p:cNvPr id="11" name="">
             <a:extLst xmlns:a="http://schemas.openxmlformats.org/drawingml/2006/main">
               <a:ext uri="{FF2B5EF4-FFF2-40B4-BE49-F238E27FC236}">
-                <a16:creationId xmlns:a16="http://schemas.microsoft.com/office/drawing/2014/main" id="{6C8D1FA7-DEEA-439D-BFD3-A8E747FAD274}"/>
-              </a:ext>
-            </a:extLst>
-          </p:cNvPr>
-          <p:cNvSpPr>
-            <a:spLocks xmlns:a="http://schemas.openxmlformats.org/drawingml/2006/main" noGrp="1"/>
-          </p:cNvSpPr>
-          <p:nvPr/>
-        </p:nvSpPr>
-        <p:spPr>
-          <a:xfrm xmlns:a="http://schemas.openxmlformats.org/drawingml/2006/main">
-            <a:off x="1000125" y="2247900"/>
-            <a:ext cx="476250" cy="476250"/>
-          </a:xfrm>
-          <a:prstGeom xmlns:a="http://schemas.openxmlformats.org/drawingml/2006/main" prst="ellipse">
+                <a16:creationId xmlns:a16="http://schemas.microsoft.com/office/drawing/2014/main" id="{3A44BF07-014C-46DC-BCF4-34B1EA5B9396}"/>
+              </a:ext>
+            </a:extLst>
+          </p:cNvPr>
+          <p:cNvSpPr>
+            <a:spLocks xmlns:a="http://schemas.openxmlformats.org/drawingml/2006/main" noGrp="1"/>
+          </p:cNvSpPr>
+          <p:nvPr/>
+        </p:nvSpPr>
+        <p:spPr>
+          <a:xfrm xmlns:a="http://schemas.openxmlformats.org/drawingml/2006/main">
+            <a:off x="971550" y="2124075"/>
+            <a:ext cx="38100" cy="3524250"/>
+          </a:xfrm>
+          <a:prstGeom xmlns:a="http://schemas.openxmlformats.org/drawingml/2006/main" prst="rect">
             <a:avLst/>
           </a:prstGeom>
           <a:solidFill xmlns:a="http://schemas.openxmlformats.org/drawingml/2006/main">
-            <a:srgbClr val="18324A"/>
+            <a:srgbClr val="2C6E73"/>
           </a:solidFill>
           <a:ln xmlns:a="http://schemas.openxmlformats.org/drawingml/2006/main" w="0">
-            <a:noFill/>
+            <a:solidFill>
+              <a:srgbClr val="2C6E73"/>
+            </a:solidFill>
           </a:ln>
         </p:spPr>
       </p:sp>
@@ -8297,19 +8299,19 @@
           <p:cNvPr id="12" name="">
             <a:extLst xmlns:a="http://schemas.openxmlformats.org/drawingml/2006/main">
               <a:ext uri="{FF2B5EF4-FFF2-40B4-BE49-F238E27FC236}">
-                <a16:creationId xmlns:a16="http://schemas.microsoft.com/office/drawing/2014/main" id="{D7C786BA-B08E-4642-9D1F-A5C9A0564413}"/>
-              </a:ext>
-            </a:extLst>
-          </p:cNvPr>
-          <p:cNvSpPr>
-            <a:spLocks xmlns:a="http://schemas.openxmlformats.org/drawingml/2006/main" noGrp="1"/>
-          </p:cNvSpPr>
-          <p:nvPr/>
-        </p:nvSpPr>
-        <p:spPr>
-          <a:xfrm xmlns:a="http://schemas.openxmlformats.org/drawingml/2006/main">
-            <a:off x="1000125" y="2276475"/>
-            <a:ext cx="476250" cy="419100"/>
+                <a16:creationId xmlns:a16="http://schemas.microsoft.com/office/drawing/2014/main" id="{6617C2A0-7BA4-4CE3-8353-43B02F04C159}"/>
+              </a:ext>
+            </a:extLst>
+          </p:cNvPr>
+          <p:cNvSpPr>
+            <a:spLocks xmlns:a="http://schemas.openxmlformats.org/drawingml/2006/main" noGrp="1"/>
+          </p:cNvSpPr>
+          <p:nvPr/>
+        </p:nvSpPr>
+        <p:spPr>
+          <a:xfrm xmlns:a="http://schemas.openxmlformats.org/drawingml/2006/main">
+            <a:off x="1162050" y="2200275"/>
+            <a:ext cx="400050" cy="400050"/>
           </a:xfrm>
           <a:prstGeom xmlns:a="http://schemas.openxmlformats.org/drawingml/2006/main" prst="rect">
             <a:avLst/>
@@ -8326,9 +8328,9 @@
           <a:lstStyle xmlns:a="http://schemas.openxmlformats.org/drawingml/2006/main"/>
           <a:p xmlns:a="http://schemas.openxmlformats.org/drawingml/2006/main">
             <a:pPr algn="ctr">
-              <a:defRPr sz="1350" b="1">
-                <a:solidFill>
-                  <a:srgbClr val="FFFFFF"/>
+              <a:defRPr sz="1125" b="1">
+                <a:solidFill>
+                  <a:srgbClr val="2C6E73"/>
                 </a:solidFill>
                 <a:latin typeface="Arial"/>
                 <a:ea typeface="Arial"/>
@@ -8336,9 +8338,9 @@
               </a:defRPr>
             </a:pPr>
             <a:r>
-              <a:rPr sz="1350" b="1">
-                <a:solidFill>
-                  <a:srgbClr val="FFFFFF"/>
+              <a:rPr sz="1125" b="1">
+                <a:solidFill>
+                  <a:srgbClr val="2C6E73"/>
                 </a:solidFill>
                 <a:latin typeface="Arial"/>
                 <a:ea typeface="Arial"/>
@@ -8354,19 +8356,19 @@
           <p:cNvPr id="13" name="">
             <a:extLst xmlns:a="http://schemas.openxmlformats.org/drawingml/2006/main">
               <a:ext uri="{FF2B5EF4-FFF2-40B4-BE49-F238E27FC236}">
-                <a16:creationId xmlns:a16="http://schemas.microsoft.com/office/drawing/2014/main" id="{40573967-87FE-426A-AD70-52C0D971FF24}"/>
-              </a:ext>
-            </a:extLst>
-          </p:cNvPr>
-          <p:cNvSpPr>
-            <a:spLocks xmlns:a="http://schemas.openxmlformats.org/drawingml/2006/main" noGrp="1"/>
-          </p:cNvSpPr>
-          <p:nvPr/>
-        </p:nvSpPr>
-        <p:spPr>
-          <a:xfrm xmlns:a="http://schemas.openxmlformats.org/drawingml/2006/main">
-            <a:off x="1714500" y="2181225"/>
-            <a:ext cx="9429750" cy="609600"/>
+                <a16:creationId xmlns:a16="http://schemas.microsoft.com/office/drawing/2014/main" id="{04F9D52F-4D48-42CD-B9D4-304755C3FC07}"/>
+              </a:ext>
+            </a:extLst>
+          </p:cNvPr>
+          <p:cNvSpPr>
+            <a:spLocks xmlns:a="http://schemas.openxmlformats.org/drawingml/2006/main" noGrp="1"/>
+          </p:cNvSpPr>
+          <p:nvPr/>
+        </p:nvSpPr>
+        <p:spPr>
+          <a:xfrm xmlns:a="http://schemas.openxmlformats.org/drawingml/2006/main">
+            <a:off x="1714500" y="2114550"/>
+            <a:ext cx="9525000" cy="809625"/>
           </a:xfrm>
           <a:prstGeom xmlns:a="http://schemas.openxmlformats.org/drawingml/2006/main" prst="rect">
             <a:avLst/>
@@ -8383,7 +8385,7 @@
           <a:lstStyle xmlns:a="http://schemas.openxmlformats.org/drawingml/2006/main"/>
           <a:p xmlns:a="http://schemas.openxmlformats.org/drawingml/2006/main">
             <a:pPr algn="l">
-              <a:defRPr sz="1500" b="0">
+              <a:defRPr sz="1725" b="0">
                 <a:solidFill>
                   <a:srgbClr val="17253A"/>
                 </a:solidFill>
@@ -8393,7 +8395,7 @@
               </a:defRPr>
             </a:pPr>
             <a:r>
-              <a:rPr sz="1500" b="0">
+              <a:rPr sz="1725" b="0">
                 <a:solidFill>
                   <a:srgbClr val="17253A"/>
                 </a:solidFill>
@@ -8401,7 +8403,7 @@
                 <a:ea typeface="Arial"/>
                 <a:cs typeface="Arial"/>
               </a:rPr>
-              <a:t>Identify the structure: Write the conversion fact and identify whether the unit becomes larger or smaller.</a:t>
+              <a:t>5 miles ≈ 8 km</a:t>
             </a:r>
           </a:p>
         </p:txBody>
@@ -8411,28 +8413,30 @@
           <p:cNvPr id="14" name="">
             <a:extLst xmlns:a="http://schemas.openxmlformats.org/drawingml/2006/main">
               <a:ext uri="{FF2B5EF4-FFF2-40B4-BE49-F238E27FC236}">
-                <a16:creationId xmlns:a16="http://schemas.microsoft.com/office/drawing/2014/main" id="{E2E73030-0317-4B2B-B71A-66A02C27BCD4}"/>
-              </a:ext>
-            </a:extLst>
-          </p:cNvPr>
-          <p:cNvSpPr>
-            <a:spLocks xmlns:a="http://schemas.openxmlformats.org/drawingml/2006/main" noGrp="1"/>
-          </p:cNvSpPr>
-          <p:nvPr/>
-        </p:nvSpPr>
-        <p:spPr>
-          <a:xfrm xmlns:a="http://schemas.openxmlformats.org/drawingml/2006/main">
-            <a:off x="1000125" y="2990850"/>
-            <a:ext cx="476250" cy="476250"/>
-          </a:xfrm>
-          <a:prstGeom xmlns:a="http://schemas.openxmlformats.org/drawingml/2006/main" prst="ellipse">
+                <a16:creationId xmlns:a16="http://schemas.microsoft.com/office/drawing/2014/main" id="{9BA443B1-A0F2-4566-8380-99300172CA7B}"/>
+              </a:ext>
+            </a:extLst>
+          </p:cNvPr>
+          <p:cNvSpPr>
+            <a:spLocks xmlns:a="http://schemas.openxmlformats.org/drawingml/2006/main" noGrp="1"/>
+          </p:cNvSpPr>
+          <p:nvPr/>
+        </p:nvSpPr>
+        <p:spPr>
+          <a:xfrm xmlns:a="http://schemas.openxmlformats.org/drawingml/2006/main">
+            <a:off x="1714500" y="2943225"/>
+            <a:ext cx="9334500" cy="9525"/>
+          </a:xfrm>
+          <a:prstGeom xmlns:a="http://schemas.openxmlformats.org/drawingml/2006/main" prst="rect">
             <a:avLst/>
           </a:prstGeom>
           <a:solidFill xmlns:a="http://schemas.openxmlformats.org/drawingml/2006/main">
-            <a:srgbClr val="2C6E73"/>
+            <a:srgbClr val="D9E0E6"/>
           </a:solidFill>
           <a:ln xmlns:a="http://schemas.openxmlformats.org/drawingml/2006/main" w="0">
-            <a:noFill/>
+            <a:solidFill>
+              <a:srgbClr val="D9E0E6"/>
+            </a:solidFill>
           </a:ln>
         </p:spPr>
       </p:sp>
@@ -8441,19 +8445,19 @@
           <p:cNvPr id="15" name="">
             <a:extLst xmlns:a="http://schemas.openxmlformats.org/drawingml/2006/main">
               <a:ext uri="{FF2B5EF4-FFF2-40B4-BE49-F238E27FC236}">
-                <a16:creationId xmlns:a16="http://schemas.microsoft.com/office/drawing/2014/main" id="{81F879CC-AED7-439E-BE28-5C0A1F1142F6}"/>
-              </a:ext>
-            </a:extLst>
-          </p:cNvPr>
-          <p:cNvSpPr>
-            <a:spLocks xmlns:a="http://schemas.openxmlformats.org/drawingml/2006/main" noGrp="1"/>
-          </p:cNvSpPr>
-          <p:nvPr/>
-        </p:nvSpPr>
-        <p:spPr>
-          <a:xfrm xmlns:a="http://schemas.openxmlformats.org/drawingml/2006/main">
-            <a:off x="1000125" y="3019425"/>
-            <a:ext cx="476250" cy="419100"/>
+                <a16:creationId xmlns:a16="http://schemas.microsoft.com/office/drawing/2014/main" id="{6094B2BC-EC3C-4E6D-90CD-B4F229F252B7}"/>
+              </a:ext>
+            </a:extLst>
+          </p:cNvPr>
+          <p:cNvSpPr>
+            <a:spLocks xmlns:a="http://schemas.openxmlformats.org/drawingml/2006/main" noGrp="1"/>
+          </p:cNvSpPr>
+          <p:nvPr/>
+        </p:nvSpPr>
+        <p:spPr>
+          <a:xfrm xmlns:a="http://schemas.openxmlformats.org/drawingml/2006/main">
+            <a:off x="1162050" y="3076575"/>
+            <a:ext cx="400050" cy="400050"/>
           </a:xfrm>
           <a:prstGeom xmlns:a="http://schemas.openxmlformats.org/drawingml/2006/main" prst="rect">
             <a:avLst/>
@@ -8470,9 +8474,9 @@
           <a:lstStyle xmlns:a="http://schemas.openxmlformats.org/drawingml/2006/main"/>
           <a:p xmlns:a="http://schemas.openxmlformats.org/drawingml/2006/main">
             <a:pPr algn="ctr">
-              <a:defRPr sz="1350" b="1">
-                <a:solidFill>
-                  <a:srgbClr val="FFFFFF"/>
+              <a:defRPr sz="1125" b="1">
+                <a:solidFill>
+                  <a:srgbClr val="2C6E73"/>
                 </a:solidFill>
                 <a:latin typeface="Arial"/>
                 <a:ea typeface="Arial"/>
@@ -8480,9 +8484,9 @@
               </a:defRPr>
             </a:pPr>
             <a:r>
-              <a:rPr sz="1350" b="1">
-                <a:solidFill>
-                  <a:srgbClr val="FFFFFF"/>
+              <a:rPr sz="1125" b="1">
+                <a:solidFill>
+                  <a:srgbClr val="2C6E73"/>
                 </a:solidFill>
                 <a:latin typeface="Arial"/>
                 <a:ea typeface="Arial"/>
@@ -8498,19 +8502,19 @@
           <p:cNvPr id="16" name="">
             <a:extLst xmlns:a="http://schemas.openxmlformats.org/drawingml/2006/main">
               <a:ext uri="{FF2B5EF4-FFF2-40B4-BE49-F238E27FC236}">
-                <a16:creationId xmlns:a16="http://schemas.microsoft.com/office/drawing/2014/main" id="{4DD4BDC9-38D9-4C67-88A5-90FEEB35AFF9}"/>
-              </a:ext>
-            </a:extLst>
-          </p:cNvPr>
-          <p:cNvSpPr>
-            <a:spLocks xmlns:a="http://schemas.openxmlformats.org/drawingml/2006/main" noGrp="1"/>
-          </p:cNvSpPr>
-          <p:nvPr/>
-        </p:nvSpPr>
-        <p:spPr>
-          <a:xfrm xmlns:a="http://schemas.openxmlformats.org/drawingml/2006/main">
-            <a:off x="1714500" y="2924175"/>
-            <a:ext cx="9429750" cy="609600"/>
+                <a16:creationId xmlns:a16="http://schemas.microsoft.com/office/drawing/2014/main" id="{7481CFA4-C063-4ABC-AFD7-C89A1AD1C0AB}"/>
+              </a:ext>
+            </a:extLst>
+          </p:cNvPr>
+          <p:cNvSpPr>
+            <a:spLocks xmlns:a="http://schemas.openxmlformats.org/drawingml/2006/main" noGrp="1"/>
+          </p:cNvSpPr>
+          <p:nvPr/>
+        </p:nvSpPr>
+        <p:spPr>
+          <a:xfrm xmlns:a="http://schemas.openxmlformats.org/drawingml/2006/main">
+            <a:off x="1714500" y="2990850"/>
+            <a:ext cx="9525000" cy="809625"/>
           </a:xfrm>
           <a:prstGeom xmlns:a="http://schemas.openxmlformats.org/drawingml/2006/main" prst="rect">
             <a:avLst/>
@@ -8527,7 +8531,7 @@
           <a:lstStyle xmlns:a="http://schemas.openxmlformats.org/drawingml/2006/main"/>
           <a:p xmlns:a="http://schemas.openxmlformats.org/drawingml/2006/main">
             <a:pPr algn="l">
-              <a:defRPr sz="1500" b="0">
+              <a:defRPr sz="1725" b="0">
                 <a:solidFill>
                   <a:srgbClr val="17253A"/>
                 </a:solidFill>
@@ -8537,7 +8541,7 @@
               </a:defRPr>
             </a:pPr>
             <a:r>
-              <a:rPr sz="1500" b="0">
+              <a:rPr sz="1725" b="0">
                 <a:solidFill>
                   <a:srgbClr val="17253A"/>
                 </a:solidFill>
@@ -8545,7 +8549,7 @@
                 <a:ea typeface="Arial"/>
                 <a:cs typeface="Arial"/>
               </a:rPr>
-              <a:t>Set up the method: Multiply or divide by the correct scale factor.</a:t>
+              <a:t>30 miles is 6 groups of 5 miles</a:t>
             </a:r>
           </a:p>
         </p:txBody>
@@ -8555,28 +8559,30 @@
           <p:cNvPr id="17" name="">
             <a:extLst xmlns:a="http://schemas.openxmlformats.org/drawingml/2006/main">
               <a:ext uri="{FF2B5EF4-FFF2-40B4-BE49-F238E27FC236}">
-                <a16:creationId xmlns:a16="http://schemas.microsoft.com/office/drawing/2014/main" id="{7805F641-9A42-4E7E-AA5C-3F4DFBAE9977}"/>
-              </a:ext>
-            </a:extLst>
-          </p:cNvPr>
-          <p:cNvSpPr>
-            <a:spLocks xmlns:a="http://schemas.openxmlformats.org/drawingml/2006/main" noGrp="1"/>
-          </p:cNvSpPr>
-          <p:nvPr/>
-        </p:nvSpPr>
-        <p:spPr>
-          <a:xfrm xmlns:a="http://schemas.openxmlformats.org/drawingml/2006/main">
-            <a:off x="1000125" y="3733800"/>
-            <a:ext cx="476250" cy="476250"/>
-          </a:xfrm>
-          <a:prstGeom xmlns:a="http://schemas.openxmlformats.org/drawingml/2006/main" prst="ellipse">
+                <a16:creationId xmlns:a16="http://schemas.microsoft.com/office/drawing/2014/main" id="{3E7EEA31-8A9A-4C60-9758-E64C1CD06FBA}"/>
+              </a:ext>
+            </a:extLst>
+          </p:cNvPr>
+          <p:cNvSpPr>
+            <a:spLocks xmlns:a="http://schemas.openxmlformats.org/drawingml/2006/main" noGrp="1"/>
+          </p:cNvSpPr>
+          <p:nvPr/>
+        </p:nvSpPr>
+        <p:spPr>
+          <a:xfrm xmlns:a="http://schemas.openxmlformats.org/drawingml/2006/main">
+            <a:off x="1714500" y="3819525"/>
+            <a:ext cx="9334500" cy="9525"/>
+          </a:xfrm>
+          <a:prstGeom xmlns:a="http://schemas.openxmlformats.org/drawingml/2006/main" prst="rect">
             <a:avLst/>
           </a:prstGeom>
           <a:solidFill xmlns:a="http://schemas.openxmlformats.org/drawingml/2006/main">
-            <a:srgbClr val="2C6E73"/>
+            <a:srgbClr val="D9E0E6"/>
           </a:solidFill>
           <a:ln xmlns:a="http://schemas.openxmlformats.org/drawingml/2006/main" w="0">
-            <a:noFill/>
+            <a:solidFill>
+              <a:srgbClr val="D9E0E6"/>
+            </a:solidFill>
           </a:ln>
         </p:spPr>
       </p:sp>
@@ -8585,19 +8591,19 @@
           <p:cNvPr id="18" name="">
             <a:extLst xmlns:a="http://schemas.openxmlformats.org/drawingml/2006/main">
               <a:ext uri="{FF2B5EF4-FFF2-40B4-BE49-F238E27FC236}">
-                <a16:creationId xmlns:a16="http://schemas.microsoft.com/office/drawing/2014/main" id="{8643B5AE-75DE-43BF-8E45-8E32E610C27B}"/>
-              </a:ext>
-            </a:extLst>
-          </p:cNvPr>
-          <p:cNvSpPr>
-            <a:spLocks xmlns:a="http://schemas.openxmlformats.org/drawingml/2006/main" noGrp="1"/>
-          </p:cNvSpPr>
-          <p:nvPr/>
-        </p:nvSpPr>
-        <p:spPr>
-          <a:xfrm xmlns:a="http://schemas.openxmlformats.org/drawingml/2006/main">
-            <a:off x="1000125" y="3762375"/>
-            <a:ext cx="476250" cy="419100"/>
+                <a16:creationId xmlns:a16="http://schemas.microsoft.com/office/drawing/2014/main" id="{C575DA70-415B-4069-BAF7-A5FDF112773B}"/>
+              </a:ext>
+            </a:extLst>
+          </p:cNvPr>
+          <p:cNvSpPr>
+            <a:spLocks xmlns:a="http://schemas.openxmlformats.org/drawingml/2006/main" noGrp="1"/>
+          </p:cNvSpPr>
+          <p:nvPr/>
+        </p:nvSpPr>
+        <p:spPr>
+          <a:xfrm xmlns:a="http://schemas.openxmlformats.org/drawingml/2006/main">
+            <a:off x="1162050" y="3952875"/>
+            <a:ext cx="400050" cy="400050"/>
           </a:xfrm>
           <a:prstGeom xmlns:a="http://schemas.openxmlformats.org/drawingml/2006/main" prst="rect">
             <a:avLst/>
@@ -8614,9 +8620,9 @@
           <a:lstStyle xmlns:a="http://schemas.openxmlformats.org/drawingml/2006/main"/>
           <a:p xmlns:a="http://schemas.openxmlformats.org/drawingml/2006/main">
             <a:pPr algn="ctr">
-              <a:defRPr sz="1350" b="1">
-                <a:solidFill>
-                  <a:srgbClr val="FFFFFF"/>
+              <a:defRPr sz="1125" b="1">
+                <a:solidFill>
+                  <a:srgbClr val="2C6E73"/>
                 </a:solidFill>
                 <a:latin typeface="Arial"/>
                 <a:ea typeface="Arial"/>
@@ -8624,9 +8630,9 @@
               </a:defRPr>
             </a:pPr>
             <a:r>
-              <a:rPr sz="1350" b="1">
-                <a:solidFill>
-                  <a:srgbClr val="FFFFFF"/>
+              <a:rPr sz="1125" b="1">
+                <a:solidFill>
+                  <a:srgbClr val="2C6E73"/>
                 </a:solidFill>
                 <a:latin typeface="Arial"/>
                 <a:ea typeface="Arial"/>
@@ -8642,19 +8648,19 @@
           <p:cNvPr id="19" name="">
             <a:extLst xmlns:a="http://schemas.openxmlformats.org/drawingml/2006/main">
               <a:ext uri="{FF2B5EF4-FFF2-40B4-BE49-F238E27FC236}">
-                <a16:creationId xmlns:a16="http://schemas.microsoft.com/office/drawing/2014/main" id="{D63F7F28-0AF9-4805-A4E0-34B21C1D1C68}"/>
-              </a:ext>
-            </a:extLst>
-          </p:cNvPr>
-          <p:cNvSpPr>
-            <a:spLocks xmlns:a="http://schemas.openxmlformats.org/drawingml/2006/main" noGrp="1"/>
-          </p:cNvSpPr>
-          <p:nvPr/>
-        </p:nvSpPr>
-        <p:spPr>
-          <a:xfrm xmlns:a="http://schemas.openxmlformats.org/drawingml/2006/main">
-            <a:off x="1714500" y="3667125"/>
-            <a:ext cx="9429750" cy="609600"/>
+                <a16:creationId xmlns:a16="http://schemas.microsoft.com/office/drawing/2014/main" id="{62CB75FC-EE04-4330-AA02-700721E269DC}"/>
+              </a:ext>
+            </a:extLst>
+          </p:cNvPr>
+          <p:cNvSpPr>
+            <a:spLocks xmlns:a="http://schemas.openxmlformats.org/drawingml/2006/main" noGrp="1"/>
+          </p:cNvSpPr>
+          <p:nvPr/>
+        </p:nvSpPr>
+        <p:spPr>
+          <a:xfrm xmlns:a="http://schemas.openxmlformats.org/drawingml/2006/main">
+            <a:off x="1714500" y="3867150"/>
+            <a:ext cx="9525000" cy="809625"/>
           </a:xfrm>
           <a:prstGeom xmlns:a="http://schemas.openxmlformats.org/drawingml/2006/main" prst="rect">
             <a:avLst/>
@@ -8671,7 +8677,7 @@
           <a:lstStyle xmlns:a="http://schemas.openxmlformats.org/drawingml/2006/main"/>
           <a:p xmlns:a="http://schemas.openxmlformats.org/drawingml/2006/main">
             <a:pPr algn="l">
-              <a:defRPr sz="1500" b="0">
+              <a:defRPr sz="1725" b="0">
                 <a:solidFill>
                   <a:srgbClr val="17253A"/>
                 </a:solidFill>
@@ -8681,7 +8687,7 @@
               </a:defRPr>
             </a:pPr>
             <a:r>
-              <a:rPr sz="1500" b="0">
+              <a:rPr sz="1725" b="0">
                 <a:solidFill>
                   <a:srgbClr val="17253A"/>
                 </a:solidFill>
@@ -8689,7 +8695,7 @@
                 <a:ea typeface="Arial"/>
                 <a:cs typeface="Arial"/>
               </a:rPr>
-              <a:t>Complete the calculation: About 48 km.</a:t>
+              <a:t>6 × 8 km</a:t>
             </a:r>
           </a:p>
         </p:txBody>
@@ -8699,28 +8705,30 @@
           <p:cNvPr id="20" name="">
             <a:extLst xmlns:a="http://schemas.openxmlformats.org/drawingml/2006/main">
               <a:ext uri="{FF2B5EF4-FFF2-40B4-BE49-F238E27FC236}">
-                <a16:creationId xmlns:a16="http://schemas.microsoft.com/office/drawing/2014/main" id="{95E4C71F-E0D6-4EB7-B12C-D53BACE2304C}"/>
-              </a:ext>
-            </a:extLst>
-          </p:cNvPr>
-          <p:cNvSpPr>
-            <a:spLocks xmlns:a="http://schemas.openxmlformats.org/drawingml/2006/main" noGrp="1"/>
-          </p:cNvSpPr>
-          <p:nvPr/>
-        </p:nvSpPr>
-        <p:spPr>
-          <a:xfrm xmlns:a="http://schemas.openxmlformats.org/drawingml/2006/main">
-            <a:off x="1000125" y="4476750"/>
-            <a:ext cx="476250" cy="476250"/>
-          </a:xfrm>
-          <a:prstGeom xmlns:a="http://schemas.openxmlformats.org/drawingml/2006/main" prst="ellipse">
+                <a16:creationId xmlns:a16="http://schemas.microsoft.com/office/drawing/2014/main" id="{939FBFDF-9994-4649-833D-93275D7021C7}"/>
+              </a:ext>
+            </a:extLst>
+          </p:cNvPr>
+          <p:cNvSpPr>
+            <a:spLocks xmlns:a="http://schemas.openxmlformats.org/drawingml/2006/main" noGrp="1"/>
+          </p:cNvSpPr>
+          <p:nvPr/>
+        </p:nvSpPr>
+        <p:spPr>
+          <a:xfrm xmlns:a="http://schemas.openxmlformats.org/drawingml/2006/main">
+            <a:off x="1714500" y="4695825"/>
+            <a:ext cx="9334500" cy="9525"/>
+          </a:xfrm>
+          <a:prstGeom xmlns:a="http://schemas.openxmlformats.org/drawingml/2006/main" prst="rect">
             <a:avLst/>
           </a:prstGeom>
           <a:solidFill xmlns:a="http://schemas.openxmlformats.org/drawingml/2006/main">
-            <a:srgbClr val="2C6E73"/>
+            <a:srgbClr val="D9E0E6"/>
           </a:solidFill>
           <a:ln xmlns:a="http://schemas.openxmlformats.org/drawingml/2006/main" w="0">
-            <a:noFill/>
+            <a:solidFill>
+              <a:srgbClr val="D9E0E6"/>
+            </a:solidFill>
           </a:ln>
         </p:spPr>
       </p:sp>
@@ -8729,19 +8737,19 @@
           <p:cNvPr id="21" name="">
             <a:extLst xmlns:a="http://schemas.openxmlformats.org/drawingml/2006/main">
               <a:ext uri="{FF2B5EF4-FFF2-40B4-BE49-F238E27FC236}">
-                <a16:creationId xmlns:a16="http://schemas.microsoft.com/office/drawing/2014/main" id="{6FEF5BBF-E4DC-4862-989F-E2E1777DF7E5}"/>
-              </a:ext>
-            </a:extLst>
-          </p:cNvPr>
-          <p:cNvSpPr>
-            <a:spLocks xmlns:a="http://schemas.openxmlformats.org/drawingml/2006/main" noGrp="1"/>
-          </p:cNvSpPr>
-          <p:nvPr/>
-        </p:nvSpPr>
-        <p:spPr>
-          <a:xfrm xmlns:a="http://schemas.openxmlformats.org/drawingml/2006/main">
-            <a:off x="1000125" y="4505325"/>
-            <a:ext cx="476250" cy="419100"/>
+                <a16:creationId xmlns:a16="http://schemas.microsoft.com/office/drawing/2014/main" id="{6A6B9FA8-AF62-45F6-8A5D-B932F63E014D}"/>
+              </a:ext>
+            </a:extLst>
+          </p:cNvPr>
+          <p:cNvSpPr>
+            <a:spLocks xmlns:a="http://schemas.openxmlformats.org/drawingml/2006/main" noGrp="1"/>
+          </p:cNvSpPr>
+          <p:nvPr/>
+        </p:nvSpPr>
+        <p:spPr>
+          <a:xfrm xmlns:a="http://schemas.openxmlformats.org/drawingml/2006/main">
+            <a:off x="1162050" y="4829175"/>
+            <a:ext cx="400050" cy="400050"/>
           </a:xfrm>
           <a:prstGeom xmlns:a="http://schemas.openxmlformats.org/drawingml/2006/main" prst="rect">
             <a:avLst/>
@@ -8758,9 +8766,9 @@
           <a:lstStyle xmlns:a="http://schemas.openxmlformats.org/drawingml/2006/main"/>
           <a:p xmlns:a="http://schemas.openxmlformats.org/drawingml/2006/main">
             <a:pPr algn="ctr">
-              <a:defRPr sz="1350" b="1">
-                <a:solidFill>
-                  <a:srgbClr val="FFFFFF"/>
+              <a:defRPr sz="1125" b="1">
+                <a:solidFill>
+                  <a:srgbClr val="2F785D"/>
                 </a:solidFill>
                 <a:latin typeface="Arial"/>
                 <a:ea typeface="Arial"/>
@@ -8768,9 +8776,9 @@
               </a:defRPr>
             </a:pPr>
             <a:r>
-              <a:rPr sz="1350" b="1">
-                <a:solidFill>
-                  <a:srgbClr val="FFFFFF"/>
+              <a:rPr sz="1125" b="1">
+                <a:solidFill>
+                  <a:srgbClr val="2F785D"/>
                 </a:solidFill>
                 <a:latin typeface="Arial"/>
                 <a:ea typeface="Arial"/>
@@ -8786,19 +8794,19 @@
           <p:cNvPr id="22" name="">
             <a:extLst xmlns:a="http://schemas.openxmlformats.org/drawingml/2006/main">
               <a:ext uri="{FF2B5EF4-FFF2-40B4-BE49-F238E27FC236}">
-                <a16:creationId xmlns:a16="http://schemas.microsoft.com/office/drawing/2014/main" id="{13236B99-7958-4060-8079-1BE02E20FC55}"/>
-              </a:ext>
-            </a:extLst>
-          </p:cNvPr>
-          <p:cNvSpPr>
-            <a:spLocks xmlns:a="http://schemas.openxmlformats.org/drawingml/2006/main" noGrp="1"/>
-          </p:cNvSpPr>
-          <p:nvPr/>
-        </p:nvSpPr>
-        <p:spPr>
-          <a:xfrm xmlns:a="http://schemas.openxmlformats.org/drawingml/2006/main">
-            <a:off x="1714500" y="4410075"/>
-            <a:ext cx="9429750" cy="609600"/>
+                <a16:creationId xmlns:a16="http://schemas.microsoft.com/office/drawing/2014/main" id="{A5D03CAA-B29F-4DBB-B69D-A1C1B9B00514}"/>
+              </a:ext>
+            </a:extLst>
+          </p:cNvPr>
+          <p:cNvSpPr>
+            <a:spLocks xmlns:a="http://schemas.openxmlformats.org/drawingml/2006/main" noGrp="1"/>
+          </p:cNvSpPr>
+          <p:nvPr/>
+        </p:nvSpPr>
+        <p:spPr>
+          <a:xfrm xmlns:a="http://schemas.openxmlformats.org/drawingml/2006/main">
+            <a:off x="1714500" y="4743450"/>
+            <a:ext cx="9525000" cy="809625"/>
           </a:xfrm>
           <a:prstGeom xmlns:a="http://schemas.openxmlformats.org/drawingml/2006/main" prst="rect">
             <a:avLst/>
@@ -8815,7 +8823,7 @@
           <a:lstStyle xmlns:a="http://schemas.openxmlformats.org/drawingml/2006/main"/>
           <a:p xmlns:a="http://schemas.openxmlformats.org/drawingml/2006/main">
             <a:pPr algn="l">
-              <a:defRPr sz="1500" b="1">
+              <a:defRPr sz="1725" b="1">
                 <a:solidFill>
                   <a:srgbClr val="2F785D"/>
                 </a:solidFill>
@@ -8825,7 +8833,7 @@
               </a:defRPr>
             </a:pPr>
             <a:r>
-              <a:rPr sz="1500" b="1">
+              <a:rPr sz="1725" b="1">
                 <a:solidFill>
                   <a:srgbClr val="2F785D"/>
                 </a:solidFill>
@@ -8833,7 +8841,7 @@
                 <a:ea typeface="Arial"/>
                 <a:cs typeface="Arial"/>
               </a:rPr>
-              <a:t>Check the result: Attach the unit and check the answer's size in context.</a:t>
+              <a:t>About 48 km</a:t>
             </a:r>
           </a:p>
         </p:txBody>
@@ -8841,7 +8849,7 @@
     </p:spTree>
     <p:extLst>
       <p:ext uri="{BB962C8B-B14F-4D97-AF65-F5344CB8AC3E}">
-        <p14:creationId xmlns:p14="http://schemas.microsoft.com/office/powerpoint/2010/main" val="371199085"/>
+        <p14:creationId xmlns:p14="http://schemas.microsoft.com/office/powerpoint/2010/main" val="1099174144"/>
       </p:ext>
     </p:extLst>
   </p:cSld>
@@ -9134,7 +9142,7 @@
           <p:cNvPr id="15" name="">
             <a:extLst xmlns:a="http://schemas.openxmlformats.org/drawingml/2006/main">
               <a:ext uri="{FF2B5EF4-FFF2-40B4-BE49-F238E27FC236}">
-                <a16:creationId xmlns:a16="http://schemas.microsoft.com/office/drawing/2014/main" id="{4EDABBC5-A6D7-4445-8857-B5C70DDE103E}"/>
+                <a16:creationId xmlns:a16="http://schemas.microsoft.com/office/drawing/2014/main" id="{ABA1ADCE-C226-4D81-BDB9-E4129C53B9DF}"/>
               </a:ext>
             </a:extLst>
           </p:cNvPr>
@@ -9166,7 +9174,7 @@
           <p:cNvPr id="2" name="">
             <a:extLst xmlns:a="http://schemas.openxmlformats.org/drawingml/2006/main">
               <a:ext uri="{FF2B5EF4-FFF2-40B4-BE49-F238E27FC236}">
-                <a16:creationId xmlns:a16="http://schemas.microsoft.com/office/drawing/2014/main" id="{EFC7B800-6BE2-4483-A065-B7E5366E4EF7}"/>
+                <a16:creationId xmlns:a16="http://schemas.microsoft.com/office/drawing/2014/main" id="{3CCAD253-FEFB-4DD2-9967-F0FCC86D2538}"/>
               </a:ext>
             </a:extLst>
           </p:cNvPr>
@@ -9223,7 +9231,7 @@
           <p:cNvPr id="3" name="">
             <a:extLst xmlns:a="http://schemas.openxmlformats.org/drawingml/2006/main">
               <a:ext uri="{FF2B5EF4-FFF2-40B4-BE49-F238E27FC236}">
-                <a16:creationId xmlns:a16="http://schemas.microsoft.com/office/drawing/2014/main" id="{93744257-AC81-4808-AE63-082763813AC2}"/>
+                <a16:creationId xmlns:a16="http://schemas.microsoft.com/office/drawing/2014/main" id="{1C6AED96-7DF5-42EA-AFD4-F561FFCC121D}"/>
               </a:ext>
             </a:extLst>
           </p:cNvPr>
@@ -9255,7 +9263,7 @@
           <p:cNvPr id="4" name="">
             <a:extLst xmlns:a="http://schemas.openxmlformats.org/drawingml/2006/main">
               <a:ext uri="{FF2B5EF4-FFF2-40B4-BE49-F238E27FC236}">
-                <a16:creationId xmlns:a16="http://schemas.microsoft.com/office/drawing/2014/main" id="{CBB5944E-EC9F-4D3C-94C6-4641EDC74967}"/>
+                <a16:creationId xmlns:a16="http://schemas.microsoft.com/office/drawing/2014/main" id="{09424656-D778-4C64-A2E9-32735B7E83D5}"/>
               </a:ext>
             </a:extLst>
           </p:cNvPr>
@@ -9312,7 +9320,7 @@
           <p:cNvPr id="5" name="">
             <a:extLst xmlns:a="http://schemas.openxmlformats.org/drawingml/2006/main">
               <a:ext uri="{FF2B5EF4-FFF2-40B4-BE49-F238E27FC236}">
-                <a16:creationId xmlns:a16="http://schemas.microsoft.com/office/drawing/2014/main" id="{59B3E946-8E55-4139-B3E2-C2BED07682CE}"/>
+                <a16:creationId xmlns:a16="http://schemas.microsoft.com/office/drawing/2014/main" id="{088734AB-7C87-4B8F-87D5-F89941A2D646}"/>
               </a:ext>
             </a:extLst>
           </p:cNvPr>
@@ -9369,7 +9377,7 @@
           <p:cNvPr id="6" name="">
             <a:extLst xmlns:a="http://schemas.openxmlformats.org/drawingml/2006/main">
               <a:ext uri="{FF2B5EF4-FFF2-40B4-BE49-F238E27FC236}">
-                <a16:creationId xmlns:a16="http://schemas.microsoft.com/office/drawing/2014/main" id="{77F1C039-032F-4025-93E3-75D158516AB9}"/>
+                <a16:creationId xmlns:a16="http://schemas.microsoft.com/office/drawing/2014/main" id="{01920276-3B7F-48FB-A323-40864DACAA0E}"/>
               </a:ext>
             </a:extLst>
           </p:cNvPr>
@@ -9426,7 +9434,7 @@
           <p:cNvPr id="7" name="">
             <a:extLst xmlns:a="http://schemas.openxmlformats.org/drawingml/2006/main">
               <a:ext uri="{FF2B5EF4-FFF2-40B4-BE49-F238E27FC236}">
-                <a16:creationId xmlns:a16="http://schemas.microsoft.com/office/drawing/2014/main" id="{EF63E56B-6804-45E5-A00F-EDEECDF7629C}"/>
+                <a16:creationId xmlns:a16="http://schemas.microsoft.com/office/drawing/2014/main" id="{0DF1D89E-8CE8-46AF-BC43-7E3CCECF38E5}"/>
               </a:ext>
             </a:extLst>
           </p:cNvPr>
@@ -9458,7 +9466,7 @@
           <p:cNvPr id="8" name="">
             <a:extLst xmlns:a="http://schemas.openxmlformats.org/drawingml/2006/main">
               <a:ext uri="{FF2B5EF4-FFF2-40B4-BE49-F238E27FC236}">
-                <a16:creationId xmlns:a16="http://schemas.microsoft.com/office/drawing/2014/main" id="{ADF29B30-A852-4AD5-BF26-7E0D73D3C00C}"/>
+                <a16:creationId xmlns:a16="http://schemas.microsoft.com/office/drawing/2014/main" id="{A04D9526-7253-445A-8740-7D9F9B220F73}"/>
               </a:ext>
             </a:extLst>
           </p:cNvPr>
@@ -9515,7 +9523,7 @@
           <p:cNvPr id="9" name="">
             <a:extLst xmlns:a="http://schemas.openxmlformats.org/drawingml/2006/main">
               <a:ext uri="{FF2B5EF4-FFF2-40B4-BE49-F238E27FC236}">
-                <a16:creationId xmlns:a16="http://schemas.microsoft.com/office/drawing/2014/main" id="{A1A94148-BCA3-4F6B-BF2D-88A1F650F27E}"/>
+                <a16:creationId xmlns:a16="http://schemas.microsoft.com/office/drawing/2014/main" id="{D24E66C6-D34E-4C8A-9E47-F1495FCB3D42}"/>
               </a:ext>
             </a:extLst>
           </p:cNvPr>
@@ -9572,7 +9580,7 @@
           <p:cNvPr id="10" name="">
             <a:extLst xmlns:a="http://schemas.openxmlformats.org/drawingml/2006/main">
               <a:ext uri="{FF2B5EF4-FFF2-40B4-BE49-F238E27FC236}">
-                <a16:creationId xmlns:a16="http://schemas.microsoft.com/office/drawing/2014/main" id="{4A707820-90EA-440D-A25F-27521D9620D3}"/>
+                <a16:creationId xmlns:a16="http://schemas.microsoft.com/office/drawing/2014/main" id="{0C58EB3E-9408-4AAF-99B8-882A33194051}"/>
               </a:ext>
             </a:extLst>
           </p:cNvPr>
@@ -9629,7 +9637,7 @@
           <p:cNvPr id="11" name="">
             <a:extLst xmlns:a="http://schemas.openxmlformats.org/drawingml/2006/main">
               <a:ext uri="{FF2B5EF4-FFF2-40B4-BE49-F238E27FC236}">
-                <a16:creationId xmlns:a16="http://schemas.microsoft.com/office/drawing/2014/main" id="{91451CD4-3546-4EE7-8D7C-2FA6DC86E3BB}"/>
+                <a16:creationId xmlns:a16="http://schemas.microsoft.com/office/drawing/2014/main" id="{617F78E9-969B-4250-9DD6-FAEACF576215}"/>
               </a:ext>
             </a:extLst>
           </p:cNvPr>
@@ -9686,7 +9694,7 @@
           <p:cNvPr id="12" name="">
             <a:extLst xmlns:a="http://schemas.openxmlformats.org/drawingml/2006/main">
               <a:ext uri="{FF2B5EF4-FFF2-40B4-BE49-F238E27FC236}">
-                <a16:creationId xmlns:a16="http://schemas.microsoft.com/office/drawing/2014/main" id="{1550F401-6BA2-4DAA-9046-3B3D7E266C4B}"/>
+                <a16:creationId xmlns:a16="http://schemas.microsoft.com/office/drawing/2014/main" id="{D4B1B645-0887-4E59-8904-07E847137AA6}"/>
               </a:ext>
             </a:extLst>
           </p:cNvPr>
@@ -9718,7 +9726,7 @@
           <p:cNvPr id="13" name="">
             <a:extLst xmlns:a="http://schemas.openxmlformats.org/drawingml/2006/main">
               <a:ext uri="{FF2B5EF4-FFF2-40B4-BE49-F238E27FC236}">
-                <a16:creationId xmlns:a16="http://schemas.microsoft.com/office/drawing/2014/main" id="{8739836E-5A75-4E9E-B7F8-5A6DE95D1C3B}"/>
+                <a16:creationId xmlns:a16="http://schemas.microsoft.com/office/drawing/2014/main" id="{35B41FDB-B4A1-4B33-B6CE-8BAA5DD7FA25}"/>
               </a:ext>
             </a:extLst>
           </p:cNvPr>
@@ -9775,7 +9783,7 @@
           <p:cNvPr id="14" name="">
             <a:extLst xmlns:a="http://schemas.openxmlformats.org/drawingml/2006/main">
               <a:ext uri="{FF2B5EF4-FFF2-40B4-BE49-F238E27FC236}">
-                <a16:creationId xmlns:a16="http://schemas.microsoft.com/office/drawing/2014/main" id="{957205E5-0567-47E1-AD96-2C4A8D005EF6}"/>
+                <a16:creationId xmlns:a16="http://schemas.microsoft.com/office/drawing/2014/main" id="{0842FBD5-07D0-4843-BA4E-C36EB6F745D1}"/>
               </a:ext>
             </a:extLst>
           </p:cNvPr>
@@ -9830,7 +9838,7 @@
     </p:spTree>
     <p:extLst>
       <p:ext uri="{BB962C8B-B14F-4D97-AF65-F5344CB8AC3E}">
-        <p14:creationId xmlns:p14="http://schemas.microsoft.com/office/powerpoint/2010/main" val="1373786237"/>
+        <p14:creationId xmlns:p14="http://schemas.microsoft.com/office/powerpoint/2010/main" val="1998674102"/>
       </p:ext>
     </p:extLst>
   </p:cSld>
@@ -10031,7 +10039,7 @@
           <p:cNvPr id="16" name="">
             <a:extLst xmlns:a="http://schemas.openxmlformats.org/drawingml/2006/main">
               <a:ext uri="{FF2B5EF4-FFF2-40B4-BE49-F238E27FC236}">
-                <a16:creationId xmlns:a16="http://schemas.microsoft.com/office/drawing/2014/main" id="{E782A770-F8F9-4385-861B-2628A73D3801}"/>
+                <a16:creationId xmlns:a16="http://schemas.microsoft.com/office/drawing/2014/main" id="{C9782D08-B99D-4F78-86C7-CB78C23D1AA8}"/>
               </a:ext>
             </a:extLst>
           </p:cNvPr>
@@ -10063,7 +10071,7 @@
           <p:cNvPr id="2" name="">
             <a:extLst xmlns:a="http://schemas.openxmlformats.org/drawingml/2006/main">
               <a:ext uri="{FF2B5EF4-FFF2-40B4-BE49-F238E27FC236}">
-                <a16:creationId xmlns:a16="http://schemas.microsoft.com/office/drawing/2014/main" id="{68E0E0BF-7939-4687-BF29-182B1312DDC5}"/>
+                <a16:creationId xmlns:a16="http://schemas.microsoft.com/office/drawing/2014/main" id="{2BD96E5F-ABC2-4EB4-9CAB-45EEFB43D673}"/>
               </a:ext>
             </a:extLst>
           </p:cNvPr>
@@ -10120,7 +10128,7 @@
           <p:cNvPr id="3" name="">
             <a:extLst xmlns:a="http://schemas.openxmlformats.org/drawingml/2006/main">
               <a:ext uri="{FF2B5EF4-FFF2-40B4-BE49-F238E27FC236}">
-                <a16:creationId xmlns:a16="http://schemas.microsoft.com/office/drawing/2014/main" id="{82295E49-CC6C-4106-ACFB-E99CF5390EC4}"/>
+                <a16:creationId xmlns:a16="http://schemas.microsoft.com/office/drawing/2014/main" id="{CDA868BE-EF5C-4C0B-9CFA-3426A12B6164}"/>
               </a:ext>
             </a:extLst>
           </p:cNvPr>
@@ -10152,7 +10160,7 @@
           <p:cNvPr id="4" name="">
             <a:extLst xmlns:a="http://schemas.openxmlformats.org/drawingml/2006/main">
               <a:ext uri="{FF2B5EF4-FFF2-40B4-BE49-F238E27FC236}">
-                <a16:creationId xmlns:a16="http://schemas.microsoft.com/office/drawing/2014/main" id="{3D74D21D-C77B-46CE-B3AF-DE12A83886C3}"/>
+                <a16:creationId xmlns:a16="http://schemas.microsoft.com/office/drawing/2014/main" id="{E2B8AA83-8193-4B08-A3DF-BAC7FBB35E2D}"/>
               </a:ext>
             </a:extLst>
           </p:cNvPr>
@@ -10209,7 +10217,7 @@
           <p:cNvPr id="5" name="">
             <a:extLst xmlns:a="http://schemas.openxmlformats.org/drawingml/2006/main">
               <a:ext uri="{FF2B5EF4-FFF2-40B4-BE49-F238E27FC236}">
-                <a16:creationId xmlns:a16="http://schemas.microsoft.com/office/drawing/2014/main" id="{BAE45824-5C37-48B0-AC58-53D2556439B8}"/>
+                <a16:creationId xmlns:a16="http://schemas.microsoft.com/office/drawing/2014/main" id="{6E6EC0BA-7F17-4372-86B6-ED5C90A58757}"/>
               </a:ext>
             </a:extLst>
           </p:cNvPr>
@@ -10266,7 +10274,7 @@
           <p:cNvPr id="6" name="">
             <a:extLst xmlns:a="http://schemas.openxmlformats.org/drawingml/2006/main">
               <a:ext uri="{FF2B5EF4-FFF2-40B4-BE49-F238E27FC236}">
-                <a16:creationId xmlns:a16="http://schemas.microsoft.com/office/drawing/2014/main" id="{271EB894-76F4-4BF1-8F02-79936227FE7D}"/>
+                <a16:creationId xmlns:a16="http://schemas.microsoft.com/office/drawing/2014/main" id="{12CF2BD9-4888-4FC0-BD98-6CB4538B87D2}"/>
               </a:ext>
             </a:extLst>
           </p:cNvPr>
@@ -10323,7 +10331,7 @@
           <p:cNvPr id="7" name="">
             <a:extLst xmlns:a="http://schemas.openxmlformats.org/drawingml/2006/main">
               <a:ext uri="{FF2B5EF4-FFF2-40B4-BE49-F238E27FC236}">
-                <a16:creationId xmlns:a16="http://schemas.microsoft.com/office/drawing/2014/main" id="{1911F364-A5FC-440B-B02E-02A926821D7D}"/>
+                <a16:creationId xmlns:a16="http://schemas.microsoft.com/office/drawing/2014/main" id="{D2077C53-5A16-4AA3-8E6F-AC5135AEA445}"/>
               </a:ext>
             </a:extLst>
           </p:cNvPr>
@@ -10355,7 +10363,7 @@
           <p:cNvPr id="8" name="">
             <a:extLst xmlns:a="http://schemas.openxmlformats.org/drawingml/2006/main">
               <a:ext uri="{FF2B5EF4-FFF2-40B4-BE49-F238E27FC236}">
-                <a16:creationId xmlns:a16="http://schemas.microsoft.com/office/drawing/2014/main" id="{9F1D3665-3E8C-4603-8CB3-5705C38A3F03}"/>
+                <a16:creationId xmlns:a16="http://schemas.microsoft.com/office/drawing/2014/main" id="{84BB1E43-34D1-4A5A-A2C9-7BE836AFE7B6}"/>
               </a:ext>
             </a:extLst>
           </p:cNvPr>
@@ -10412,7 +10420,7 @@
           <p:cNvPr id="9" name="">
             <a:extLst xmlns:a="http://schemas.openxmlformats.org/drawingml/2006/main">
               <a:ext uri="{FF2B5EF4-FFF2-40B4-BE49-F238E27FC236}">
-                <a16:creationId xmlns:a16="http://schemas.microsoft.com/office/drawing/2014/main" id="{D036A58A-2E40-4D41-8B73-93A6EBF52126}"/>
+                <a16:creationId xmlns:a16="http://schemas.microsoft.com/office/drawing/2014/main" id="{3295F7B4-86E1-4325-ABBF-8EFD53D36B5E}"/>
               </a:ext>
             </a:extLst>
           </p:cNvPr>
@@ -10469,7 +10477,7 @@
           <p:cNvPr id="10" name="">
             <a:extLst xmlns:a="http://schemas.openxmlformats.org/drawingml/2006/main">
               <a:ext uri="{FF2B5EF4-FFF2-40B4-BE49-F238E27FC236}">
-                <a16:creationId xmlns:a16="http://schemas.microsoft.com/office/drawing/2014/main" id="{09988A91-1A27-41EA-9B70-95BA1F5014EF}"/>
+                <a16:creationId xmlns:a16="http://schemas.microsoft.com/office/drawing/2014/main" id="{7BCD603E-5D07-425D-80F1-443343B773FF}"/>
               </a:ext>
             </a:extLst>
           </p:cNvPr>
@@ -10526,7 +10534,7 @@
           <p:cNvPr id="11" name="">
             <a:extLst xmlns:a="http://schemas.openxmlformats.org/drawingml/2006/main">
               <a:ext uri="{FF2B5EF4-FFF2-40B4-BE49-F238E27FC236}">
-                <a16:creationId xmlns:a16="http://schemas.microsoft.com/office/drawing/2014/main" id="{F748E390-4B73-4316-84B7-6821A2C5E6E2}"/>
+                <a16:creationId xmlns:a16="http://schemas.microsoft.com/office/drawing/2014/main" id="{19E0A6A4-B3F6-4D50-A9C5-24A654E470B3}"/>
               </a:ext>
             </a:extLst>
           </p:cNvPr>
@@ -10583,7 +10591,7 @@
           <p:cNvPr id="12" name="">
             <a:extLst xmlns:a="http://schemas.openxmlformats.org/drawingml/2006/main">
               <a:ext uri="{FF2B5EF4-FFF2-40B4-BE49-F238E27FC236}">
-                <a16:creationId xmlns:a16="http://schemas.microsoft.com/office/drawing/2014/main" id="{D023C292-9215-4589-ABFB-8B7E85BD36CC}"/>
+                <a16:creationId xmlns:a16="http://schemas.microsoft.com/office/drawing/2014/main" id="{7A5018F8-206A-4503-BD5F-D25EC4272CD2}"/>
               </a:ext>
             </a:extLst>
           </p:cNvPr>
@@ -10640,7 +10648,7 @@
           <p:cNvPr id="13" name="">
             <a:extLst xmlns:a="http://schemas.openxmlformats.org/drawingml/2006/main">
               <a:ext uri="{FF2B5EF4-FFF2-40B4-BE49-F238E27FC236}">
-                <a16:creationId xmlns:a16="http://schemas.microsoft.com/office/drawing/2014/main" id="{B76EEC42-097E-40FA-9874-744421FE2FF5}"/>
+                <a16:creationId xmlns:a16="http://schemas.microsoft.com/office/drawing/2014/main" id="{B3539D52-87F3-4605-BC5F-86B150D7F477}"/>
               </a:ext>
             </a:extLst>
           </p:cNvPr>
@@ -10697,7 +10705,7 @@
           <p:cNvPr id="14" name="">
             <a:extLst xmlns:a="http://schemas.openxmlformats.org/drawingml/2006/main">
               <a:ext uri="{FF2B5EF4-FFF2-40B4-BE49-F238E27FC236}">
-                <a16:creationId xmlns:a16="http://schemas.microsoft.com/office/drawing/2014/main" id="{3E25B5AB-4983-43B4-8E06-3F4C97F851F3}"/>
+                <a16:creationId xmlns:a16="http://schemas.microsoft.com/office/drawing/2014/main" id="{75C96BE8-D89A-449E-A886-07AEDEB1FF69}"/>
               </a:ext>
             </a:extLst>
           </p:cNvPr>
@@ -10754,7 +10762,7 @@
           <p:cNvPr id="15" name="">
             <a:extLst xmlns:a="http://schemas.openxmlformats.org/drawingml/2006/main">
               <a:ext uri="{FF2B5EF4-FFF2-40B4-BE49-F238E27FC236}">
-                <a16:creationId xmlns:a16="http://schemas.microsoft.com/office/drawing/2014/main" id="{3E27E651-94BA-47C8-A018-094B4E538217}"/>
+                <a16:creationId xmlns:a16="http://schemas.microsoft.com/office/drawing/2014/main" id="{E3B162E6-9F64-47B2-B803-E92F1D445F71}"/>
               </a:ext>
             </a:extLst>
           </p:cNvPr>
@@ -10809,7 +10817,7 @@
     </p:spTree>
     <p:extLst>
       <p:ext uri="{BB962C8B-B14F-4D97-AF65-F5344CB8AC3E}">
-        <p14:creationId xmlns:p14="http://schemas.microsoft.com/office/powerpoint/2010/main" val="1745722462"/>
+        <p14:creationId xmlns:p14="http://schemas.microsoft.com/office/powerpoint/2010/main" val="759721271"/>
       </p:ext>
     </p:extLst>
   </p:cSld>
@@ -10964,7 +10972,7 @@
           <p:cNvPr id="16" name="">
             <a:extLst xmlns:a="http://schemas.openxmlformats.org/drawingml/2006/main">
               <a:ext uri="{FF2B5EF4-FFF2-40B4-BE49-F238E27FC236}">
-                <a16:creationId xmlns:a16="http://schemas.microsoft.com/office/drawing/2014/main" id="{DF0B3906-92D2-446F-8D72-CAA9F37ACDC8}"/>
+                <a16:creationId xmlns:a16="http://schemas.microsoft.com/office/drawing/2014/main" id="{1D11F3A5-64EF-4F69-8CCA-238E5AF939AD}"/>
               </a:ext>
             </a:extLst>
           </p:cNvPr>
@@ -10996,7 +11004,7 @@
           <p:cNvPr id="2" name="">
             <a:extLst xmlns:a="http://schemas.openxmlformats.org/drawingml/2006/main">
               <a:ext uri="{FF2B5EF4-FFF2-40B4-BE49-F238E27FC236}">
-                <a16:creationId xmlns:a16="http://schemas.microsoft.com/office/drawing/2014/main" id="{00C293A7-BA4A-47B7-A6C8-065B2D5745F8}"/>
+                <a16:creationId xmlns:a16="http://schemas.microsoft.com/office/drawing/2014/main" id="{C7F08697-D06C-4605-AF7B-529789660C24}"/>
               </a:ext>
             </a:extLst>
           </p:cNvPr>
@@ -11053,7 +11061,7 @@
           <p:cNvPr id="3" name="">
             <a:extLst xmlns:a="http://schemas.openxmlformats.org/drawingml/2006/main">
               <a:ext uri="{FF2B5EF4-FFF2-40B4-BE49-F238E27FC236}">
-                <a16:creationId xmlns:a16="http://schemas.microsoft.com/office/drawing/2014/main" id="{2D974A40-DE6F-42E2-B72F-793051E09FE4}"/>
+                <a16:creationId xmlns:a16="http://schemas.microsoft.com/office/drawing/2014/main" id="{6F313347-6C16-4FA5-A7A3-546D66D67566}"/>
               </a:ext>
             </a:extLst>
           </p:cNvPr>
@@ -11085,7 +11093,7 @@
           <p:cNvPr id="4" name="">
             <a:extLst xmlns:a="http://schemas.openxmlformats.org/drawingml/2006/main">
               <a:ext uri="{FF2B5EF4-FFF2-40B4-BE49-F238E27FC236}">
-                <a16:creationId xmlns:a16="http://schemas.microsoft.com/office/drawing/2014/main" id="{AD37A471-16F8-45E7-8EE4-79041841A5E0}"/>
+                <a16:creationId xmlns:a16="http://schemas.microsoft.com/office/drawing/2014/main" id="{D39382EB-BC9B-42FF-9180-6B0AC1794A7C}"/>
               </a:ext>
             </a:extLst>
           </p:cNvPr>
@@ -11142,7 +11150,7 @@
           <p:cNvPr id="5" name="">
             <a:extLst xmlns:a="http://schemas.openxmlformats.org/drawingml/2006/main">
               <a:ext uri="{FF2B5EF4-FFF2-40B4-BE49-F238E27FC236}">
-                <a16:creationId xmlns:a16="http://schemas.microsoft.com/office/drawing/2014/main" id="{9BD87A46-7E51-4710-97BB-D1E529D2639C}"/>
+                <a16:creationId xmlns:a16="http://schemas.microsoft.com/office/drawing/2014/main" id="{B56600C8-7F3B-4659-A8F5-83503F884D39}"/>
               </a:ext>
             </a:extLst>
           </p:cNvPr>
@@ -11199,7 +11207,7 @@
           <p:cNvPr id="6" name="">
             <a:extLst xmlns:a="http://schemas.openxmlformats.org/drawingml/2006/main">
               <a:ext uri="{FF2B5EF4-FFF2-40B4-BE49-F238E27FC236}">
-                <a16:creationId xmlns:a16="http://schemas.microsoft.com/office/drawing/2014/main" id="{9DD8A826-ABBA-44C5-8193-CA41506B39C7}"/>
+                <a16:creationId xmlns:a16="http://schemas.microsoft.com/office/drawing/2014/main" id="{D570BBD6-FC47-4445-8971-06FD83CF4D52}"/>
               </a:ext>
             </a:extLst>
           </p:cNvPr>
@@ -11256,7 +11264,7 @@
           <p:cNvPr id="7" name="">
             <a:extLst xmlns:a="http://schemas.openxmlformats.org/drawingml/2006/main">
               <a:ext uri="{FF2B5EF4-FFF2-40B4-BE49-F238E27FC236}">
-                <a16:creationId xmlns:a16="http://schemas.microsoft.com/office/drawing/2014/main" id="{2920DD21-BB62-4063-91DF-1593E9155307}"/>
+                <a16:creationId xmlns:a16="http://schemas.microsoft.com/office/drawing/2014/main" id="{C2C849E3-DF54-45A4-A760-F4EDDBA213A0}"/>
               </a:ext>
             </a:extLst>
           </p:cNvPr>
@@ -11288,7 +11296,7 @@
           <p:cNvPr id="8" name="">
             <a:extLst xmlns:a="http://schemas.openxmlformats.org/drawingml/2006/main">
               <a:ext uri="{FF2B5EF4-FFF2-40B4-BE49-F238E27FC236}">
-                <a16:creationId xmlns:a16="http://schemas.microsoft.com/office/drawing/2014/main" id="{2FCE8EF8-0608-4161-BE17-EF42920CDD92}"/>
+                <a16:creationId xmlns:a16="http://schemas.microsoft.com/office/drawing/2014/main" id="{3EC86D0F-5019-4E45-941F-2A008A8D6B76}"/>
               </a:ext>
             </a:extLst>
           </p:cNvPr>
@@ -11345,7 +11353,7 @@
           <p:cNvPr id="9" name="">
             <a:extLst xmlns:a="http://schemas.openxmlformats.org/drawingml/2006/main">
               <a:ext uri="{FF2B5EF4-FFF2-40B4-BE49-F238E27FC236}">
-                <a16:creationId xmlns:a16="http://schemas.microsoft.com/office/drawing/2014/main" id="{5D53D23A-427B-4B57-8225-7DC76356A874}"/>
+                <a16:creationId xmlns:a16="http://schemas.microsoft.com/office/drawing/2014/main" id="{F70CBA78-E3E9-4139-9180-D03A42EF910A}"/>
               </a:ext>
             </a:extLst>
           </p:cNvPr>
@@ -11406,7 +11414,7 @@
           <p:nvPr/>
         </p:nvPicPr>
         <p:blipFill>
-          <a:blip xmlns:r="http://schemas.openxmlformats.org/officeDocument/2006/relationships" xmlns:a="http://schemas.openxmlformats.org/drawingml/2006/main" r:embed="Rbbb14ca43736470a"/>
+          <a:blip xmlns:r="http://schemas.openxmlformats.org/officeDocument/2006/relationships" xmlns:a="http://schemas.openxmlformats.org/drawingml/2006/main" r:embed="R1ac38102f8424c55"/>
           <a:stretch xmlns:a="http://schemas.openxmlformats.org/drawingml/2006/main"/>
         </p:blipFill>
         <p:spPr>
@@ -11424,7 +11432,7 @@
           <p:cNvPr id="11" name="">
             <a:extLst xmlns:a="http://schemas.openxmlformats.org/drawingml/2006/main">
               <a:ext uri="{FF2B5EF4-FFF2-40B4-BE49-F238E27FC236}">
-                <a16:creationId xmlns:a16="http://schemas.microsoft.com/office/drawing/2014/main" id="{8ACE62A7-4DC2-4465-9AFD-C0BD0E571A18}"/>
+                <a16:creationId xmlns:a16="http://schemas.microsoft.com/office/drawing/2014/main" id="{90554661-49B7-4840-87AC-0894861DCB45}"/>
               </a:ext>
             </a:extLst>
           </p:cNvPr>
@@ -11481,7 +11489,7 @@
           <p:cNvPr id="12" name="">
             <a:extLst xmlns:a="http://schemas.openxmlformats.org/drawingml/2006/main">
               <a:ext uri="{FF2B5EF4-FFF2-40B4-BE49-F238E27FC236}">
-                <a16:creationId xmlns:a16="http://schemas.microsoft.com/office/drawing/2014/main" id="{8102B55A-27CF-4D3D-B04B-B4A3B1DA46FC}"/>
+                <a16:creationId xmlns:a16="http://schemas.microsoft.com/office/drawing/2014/main" id="{AD70C0D7-E478-4C06-A9FD-2DEDCDD7D247}"/>
               </a:ext>
             </a:extLst>
           </p:cNvPr>
@@ -11538,7 +11546,7 @@
           <p:cNvPr id="13" name="">
             <a:extLst xmlns:a="http://schemas.openxmlformats.org/drawingml/2006/main">
               <a:ext uri="{FF2B5EF4-FFF2-40B4-BE49-F238E27FC236}">
-                <a16:creationId xmlns:a16="http://schemas.microsoft.com/office/drawing/2014/main" id="{89765047-12CF-444C-BC34-95654793E8A8}"/>
+                <a16:creationId xmlns:a16="http://schemas.microsoft.com/office/drawing/2014/main" id="{D15DA074-51B1-4DDF-BC51-7BDCC509F662}"/>
               </a:ext>
             </a:extLst>
           </p:cNvPr>
@@ -11570,7 +11578,7 @@
           <p:cNvPr id="14" name="">
             <a:extLst xmlns:a="http://schemas.openxmlformats.org/drawingml/2006/main">
               <a:ext uri="{FF2B5EF4-FFF2-40B4-BE49-F238E27FC236}">
-                <a16:creationId xmlns:a16="http://schemas.microsoft.com/office/drawing/2014/main" id="{D0489513-F952-4F3F-9EF1-5931E6C6CA59}"/>
+                <a16:creationId xmlns:a16="http://schemas.microsoft.com/office/drawing/2014/main" id="{7DFB382D-3E56-429D-AE99-CB126CAFB3AF}"/>
               </a:ext>
             </a:extLst>
           </p:cNvPr>
@@ -11627,7 +11635,7 @@
           <p:cNvPr id="15" name="">
             <a:extLst xmlns:a="http://schemas.openxmlformats.org/drawingml/2006/main">
               <a:ext uri="{FF2B5EF4-FFF2-40B4-BE49-F238E27FC236}">
-                <a16:creationId xmlns:a16="http://schemas.microsoft.com/office/drawing/2014/main" id="{23A95E2C-829E-40ED-9465-87C59EFD6CC5}"/>
+                <a16:creationId xmlns:a16="http://schemas.microsoft.com/office/drawing/2014/main" id="{B834DADA-4FD0-4D79-9AAC-4F9D9FFFC6C7}"/>
               </a:ext>
             </a:extLst>
           </p:cNvPr>
@@ -11682,7 +11690,7 @@
     </p:spTree>
     <p:extLst>
       <p:ext uri="{BB962C8B-B14F-4D97-AF65-F5344CB8AC3E}">
-        <p14:creationId xmlns:p14="http://schemas.microsoft.com/office/powerpoint/2010/main" val="400007772"/>
+        <p14:creationId xmlns:p14="http://schemas.microsoft.com/office/powerpoint/2010/main" val="1969210205"/>
       </p:ext>
     </p:extLst>
   </p:cSld>
@@ -11837,7 +11845,7 @@
           <p:cNvPr id="23" name="">
             <a:extLst xmlns:a="http://schemas.openxmlformats.org/drawingml/2006/main">
               <a:ext uri="{FF2B5EF4-FFF2-40B4-BE49-F238E27FC236}">
-                <a16:creationId xmlns:a16="http://schemas.microsoft.com/office/drawing/2014/main" id="{C641220E-D109-41FA-8DE6-6B63D942E9EC}"/>
+                <a16:creationId xmlns:a16="http://schemas.microsoft.com/office/drawing/2014/main" id="{F2DA4B2E-760C-4F73-AC18-3B3201CCA309}"/>
               </a:ext>
             </a:extLst>
           </p:cNvPr>
@@ -11869,7 +11877,7 @@
           <p:cNvPr id="2" name="">
             <a:extLst xmlns:a="http://schemas.openxmlformats.org/drawingml/2006/main">
               <a:ext uri="{FF2B5EF4-FFF2-40B4-BE49-F238E27FC236}">
-                <a16:creationId xmlns:a16="http://schemas.microsoft.com/office/drawing/2014/main" id="{09FDFB20-C889-4796-8BB5-460450E110D2}"/>
+                <a16:creationId xmlns:a16="http://schemas.microsoft.com/office/drawing/2014/main" id="{5CB6360D-7100-4A4B-9B72-104482DB577E}"/>
               </a:ext>
             </a:extLst>
           </p:cNvPr>
@@ -11926,7 +11934,7 @@
           <p:cNvPr id="3" name="">
             <a:extLst xmlns:a="http://schemas.openxmlformats.org/drawingml/2006/main">
               <a:ext uri="{FF2B5EF4-FFF2-40B4-BE49-F238E27FC236}">
-                <a16:creationId xmlns:a16="http://schemas.microsoft.com/office/drawing/2014/main" id="{9AADD9AE-3120-4409-A293-0DEC0B5D9695}"/>
+                <a16:creationId xmlns:a16="http://schemas.microsoft.com/office/drawing/2014/main" id="{23B01CBD-67DD-4C97-A224-58EF50D2E63D}"/>
               </a:ext>
             </a:extLst>
           </p:cNvPr>
@@ -11958,7 +11966,7 @@
           <p:cNvPr id="4" name="">
             <a:extLst xmlns:a="http://schemas.openxmlformats.org/drawingml/2006/main">
               <a:ext uri="{FF2B5EF4-FFF2-40B4-BE49-F238E27FC236}">
-                <a16:creationId xmlns:a16="http://schemas.microsoft.com/office/drawing/2014/main" id="{1EDD63F4-810F-4C98-9BFC-1819AA618264}"/>
+                <a16:creationId xmlns:a16="http://schemas.microsoft.com/office/drawing/2014/main" id="{6F240334-B703-4646-80E9-A5F70041B6E6}"/>
               </a:ext>
             </a:extLst>
           </p:cNvPr>
@@ -12015,7 +12023,7 @@
           <p:cNvPr id="5" name="">
             <a:extLst xmlns:a="http://schemas.openxmlformats.org/drawingml/2006/main">
               <a:ext uri="{FF2B5EF4-FFF2-40B4-BE49-F238E27FC236}">
-                <a16:creationId xmlns:a16="http://schemas.microsoft.com/office/drawing/2014/main" id="{50944059-6D76-4A71-B0F1-76D46A33FCEB}"/>
+                <a16:creationId xmlns:a16="http://schemas.microsoft.com/office/drawing/2014/main" id="{F27CC611-A445-4904-8AC9-F5389D4653E1}"/>
               </a:ext>
             </a:extLst>
           </p:cNvPr>
@@ -12072,7 +12080,7 @@
           <p:cNvPr id="6" name="">
             <a:extLst xmlns:a="http://schemas.openxmlformats.org/drawingml/2006/main">
               <a:ext uri="{FF2B5EF4-FFF2-40B4-BE49-F238E27FC236}">
-                <a16:creationId xmlns:a16="http://schemas.microsoft.com/office/drawing/2014/main" id="{24184045-8208-4D0C-8A1F-564839D0389D}"/>
+                <a16:creationId xmlns:a16="http://schemas.microsoft.com/office/drawing/2014/main" id="{11D40707-AD21-4D6A-B5E6-6B721C986F37}"/>
               </a:ext>
             </a:extLst>
           </p:cNvPr>
@@ -12129,7 +12137,7 @@
           <p:cNvPr id="7" name="">
             <a:extLst xmlns:a="http://schemas.openxmlformats.org/drawingml/2006/main">
               <a:ext uri="{FF2B5EF4-FFF2-40B4-BE49-F238E27FC236}">
-                <a16:creationId xmlns:a16="http://schemas.microsoft.com/office/drawing/2014/main" id="{660D924F-FAD3-4161-990D-0D1084A0B78B}"/>
+                <a16:creationId xmlns:a16="http://schemas.microsoft.com/office/drawing/2014/main" id="{26027C1E-F694-45AA-ACE6-796C8284D9CB}"/>
               </a:ext>
             </a:extLst>
           </p:cNvPr>
@@ -12161,7 +12169,7 @@
           <p:cNvPr id="8" name="">
             <a:extLst xmlns:a="http://schemas.openxmlformats.org/drawingml/2006/main">
               <a:ext uri="{FF2B5EF4-FFF2-40B4-BE49-F238E27FC236}">
-                <a16:creationId xmlns:a16="http://schemas.microsoft.com/office/drawing/2014/main" id="{177F4A4A-9C11-4925-B3FD-5872B974176E}"/>
+                <a16:creationId xmlns:a16="http://schemas.microsoft.com/office/drawing/2014/main" id="{E453B75F-9E96-40A5-8B7A-D08C460B676A}"/>
               </a:ext>
             </a:extLst>
           </p:cNvPr>
@@ -12218,7 +12226,7 @@
           <p:cNvPr id="9" name="">
             <a:extLst xmlns:a="http://schemas.openxmlformats.org/drawingml/2006/main">
               <a:ext uri="{FF2B5EF4-FFF2-40B4-BE49-F238E27FC236}">
-                <a16:creationId xmlns:a16="http://schemas.microsoft.com/office/drawing/2014/main" id="{94CC34CE-24DF-415B-ABA9-515B8B1ACB3B}"/>
+                <a16:creationId xmlns:a16="http://schemas.microsoft.com/office/drawing/2014/main" id="{625E2E2D-46DD-4FA6-AFB4-C3EA9827AB84}"/>
               </a:ext>
             </a:extLst>
           </p:cNvPr>
@@ -12275,7 +12283,7 @@
           <p:cNvPr id="10" name="">
             <a:extLst xmlns:a="http://schemas.openxmlformats.org/drawingml/2006/main">
               <a:ext uri="{FF2B5EF4-FFF2-40B4-BE49-F238E27FC236}">
-                <a16:creationId xmlns:a16="http://schemas.microsoft.com/office/drawing/2014/main" id="{FD70929F-E161-49CE-B486-3E8BDC426854}"/>
+                <a16:creationId xmlns:a16="http://schemas.microsoft.com/office/drawing/2014/main" id="{9D17C257-756D-4E61-A9CC-6EC1CFFC02FE}"/>
               </a:ext>
             </a:extLst>
           </p:cNvPr>
@@ -12309,7 +12317,7 @@
           <p:cNvPr id="11" name="">
             <a:extLst xmlns:a="http://schemas.openxmlformats.org/drawingml/2006/main">
               <a:ext uri="{FF2B5EF4-FFF2-40B4-BE49-F238E27FC236}">
-                <a16:creationId xmlns:a16="http://schemas.microsoft.com/office/drawing/2014/main" id="{7EF67D30-F4F8-4882-989B-9B210375E504}"/>
+                <a16:creationId xmlns:a16="http://schemas.microsoft.com/office/drawing/2014/main" id="{729EF0A1-95B5-4560-B22E-0A6C5603D29F}"/>
               </a:ext>
             </a:extLst>
           </p:cNvPr>
@@ -12341,7 +12349,7 @@
           <p:cNvPr id="12" name="">
             <a:extLst xmlns:a="http://schemas.openxmlformats.org/drawingml/2006/main">
               <a:ext uri="{FF2B5EF4-FFF2-40B4-BE49-F238E27FC236}">
-                <a16:creationId xmlns:a16="http://schemas.microsoft.com/office/drawing/2014/main" id="{AFDF110A-EADA-497B-AB18-F42751C40EC4}"/>
+                <a16:creationId xmlns:a16="http://schemas.microsoft.com/office/drawing/2014/main" id="{3FCDD438-C931-41C5-8469-BBA639D57ABA}"/>
               </a:ext>
             </a:extLst>
           </p:cNvPr>
@@ -12398,7 +12406,7 @@
           <p:cNvPr id="13" name="">
             <a:extLst xmlns:a="http://schemas.openxmlformats.org/drawingml/2006/main">
               <a:ext uri="{FF2B5EF4-FFF2-40B4-BE49-F238E27FC236}">
-                <a16:creationId xmlns:a16="http://schemas.microsoft.com/office/drawing/2014/main" id="{4E1634C4-640A-4A0E-B5B3-B9F17B77D2DE}"/>
+                <a16:creationId xmlns:a16="http://schemas.microsoft.com/office/drawing/2014/main" id="{C981DFF4-CC04-4E17-AAFB-FC522676AA11}"/>
               </a:ext>
             </a:extLst>
           </p:cNvPr>
@@ -12455,7 +12463,7 @@
           <p:cNvPr id="14" name="">
             <a:extLst xmlns:a="http://schemas.openxmlformats.org/drawingml/2006/main">
               <a:ext uri="{FF2B5EF4-FFF2-40B4-BE49-F238E27FC236}">
-                <a16:creationId xmlns:a16="http://schemas.microsoft.com/office/drawing/2014/main" id="{73F82532-FBB3-4EE8-873A-6F676925762A}"/>
+                <a16:creationId xmlns:a16="http://schemas.microsoft.com/office/drawing/2014/main" id="{85B94F83-3FDD-4D85-85F3-FE550F01BAC5}"/>
               </a:ext>
             </a:extLst>
           </p:cNvPr>
@@ -12489,7 +12497,7 @@
           <p:cNvPr id="15" name="">
             <a:extLst xmlns:a="http://schemas.openxmlformats.org/drawingml/2006/main">
               <a:ext uri="{FF2B5EF4-FFF2-40B4-BE49-F238E27FC236}">
-                <a16:creationId xmlns:a16="http://schemas.microsoft.com/office/drawing/2014/main" id="{48F4D515-4A99-4F47-9304-0BA1DDB09B3F}"/>
+                <a16:creationId xmlns:a16="http://schemas.microsoft.com/office/drawing/2014/main" id="{903B0433-43D0-4F0C-BF7F-E3CC9055B4D9}"/>
               </a:ext>
             </a:extLst>
           </p:cNvPr>
@@ -12521,7 +12529,7 @@
           <p:cNvPr id="16" name="">
             <a:extLst xmlns:a="http://schemas.openxmlformats.org/drawingml/2006/main">
               <a:ext uri="{FF2B5EF4-FFF2-40B4-BE49-F238E27FC236}">
-                <a16:creationId xmlns:a16="http://schemas.microsoft.com/office/drawing/2014/main" id="{2D64BF79-D439-40CC-891E-8B6703CB818E}"/>
+                <a16:creationId xmlns:a16="http://schemas.microsoft.com/office/drawing/2014/main" id="{4BA98586-B404-495D-8F95-98E4D0F09866}"/>
               </a:ext>
             </a:extLst>
           </p:cNvPr>
@@ -12578,7 +12586,7 @@
           <p:cNvPr id="17" name="">
             <a:extLst xmlns:a="http://schemas.openxmlformats.org/drawingml/2006/main">
               <a:ext uri="{FF2B5EF4-FFF2-40B4-BE49-F238E27FC236}">
-                <a16:creationId xmlns:a16="http://schemas.microsoft.com/office/drawing/2014/main" id="{3BCA346E-C6EC-4E74-A172-B77F54CE95E3}"/>
+                <a16:creationId xmlns:a16="http://schemas.microsoft.com/office/drawing/2014/main" id="{EDB4B128-549C-4782-8DE4-2EE99633F035}"/>
               </a:ext>
             </a:extLst>
           </p:cNvPr>
@@ -12635,7 +12643,7 @@
           <p:cNvPr id="18" name="">
             <a:extLst xmlns:a="http://schemas.openxmlformats.org/drawingml/2006/main">
               <a:ext uri="{FF2B5EF4-FFF2-40B4-BE49-F238E27FC236}">
-                <a16:creationId xmlns:a16="http://schemas.microsoft.com/office/drawing/2014/main" id="{AD447717-8A89-4B05-AD53-E856FCEAB060}"/>
+                <a16:creationId xmlns:a16="http://schemas.microsoft.com/office/drawing/2014/main" id="{FAC8D0DE-2A20-4A08-946B-9D768EE7E69B}"/>
               </a:ext>
             </a:extLst>
           </p:cNvPr>
@@ -12669,7 +12677,7 @@
           <p:cNvPr id="19" name="">
             <a:extLst xmlns:a="http://schemas.openxmlformats.org/drawingml/2006/main">
               <a:ext uri="{FF2B5EF4-FFF2-40B4-BE49-F238E27FC236}">
-                <a16:creationId xmlns:a16="http://schemas.microsoft.com/office/drawing/2014/main" id="{0EA70A51-1FF5-4131-AD95-AA78B89DF3FF}"/>
+                <a16:creationId xmlns:a16="http://schemas.microsoft.com/office/drawing/2014/main" id="{46B5AF5C-EEC5-4CD5-B514-7061505CE842}"/>
               </a:ext>
             </a:extLst>
           </p:cNvPr>
@@ -12701,7 +12709,7 @@
           <p:cNvPr id="20" name="">
             <a:extLst xmlns:a="http://schemas.openxmlformats.org/drawingml/2006/main">
               <a:ext uri="{FF2B5EF4-FFF2-40B4-BE49-F238E27FC236}">
-                <a16:creationId xmlns:a16="http://schemas.microsoft.com/office/drawing/2014/main" id="{07AB1488-EAE7-423C-8CC4-3895DFD3EF1B}"/>
+                <a16:creationId xmlns:a16="http://schemas.microsoft.com/office/drawing/2014/main" id="{A2773ECD-B90B-4E93-9156-A057524379C3}"/>
               </a:ext>
             </a:extLst>
           </p:cNvPr>
@@ -12758,7 +12766,7 @@
           <p:cNvPr id="21" name="">
             <a:extLst xmlns:a="http://schemas.openxmlformats.org/drawingml/2006/main">
               <a:ext uri="{FF2B5EF4-FFF2-40B4-BE49-F238E27FC236}">
-                <a16:creationId xmlns:a16="http://schemas.microsoft.com/office/drawing/2014/main" id="{0A0DEBDC-08F5-4876-A864-5F49235902F2}"/>
+                <a16:creationId xmlns:a16="http://schemas.microsoft.com/office/drawing/2014/main" id="{1568D27C-20BE-40F2-9157-FE9C331649CE}"/>
               </a:ext>
             </a:extLst>
           </p:cNvPr>
@@ -12815,7 +12823,7 @@
           <p:cNvPr id="22" name="">
             <a:extLst xmlns:a="http://schemas.openxmlformats.org/drawingml/2006/main">
               <a:ext uri="{FF2B5EF4-FFF2-40B4-BE49-F238E27FC236}">
-                <a16:creationId xmlns:a16="http://schemas.microsoft.com/office/drawing/2014/main" id="{2F6D4E57-8ED4-4E58-AA70-2C31F926991D}"/>
+                <a16:creationId xmlns:a16="http://schemas.microsoft.com/office/drawing/2014/main" id="{8A87AF54-F56A-4757-9934-6550120741EF}"/>
               </a:ext>
             </a:extLst>
           </p:cNvPr>
@@ -12870,7 +12878,7 @@
     </p:spTree>
     <p:extLst>
       <p:ext uri="{BB962C8B-B14F-4D97-AF65-F5344CB8AC3E}">
-        <p14:creationId xmlns:p14="http://schemas.microsoft.com/office/powerpoint/2010/main" val="1478213198"/>
+        <p14:creationId xmlns:p14="http://schemas.microsoft.com/office/powerpoint/2010/main" val="565223923"/>
       </p:ext>
     </p:extLst>
   </p:cSld>
@@ -13071,7 +13079,7 @@
           <p:cNvPr id="22" name="">
             <a:extLst xmlns:a="http://schemas.openxmlformats.org/drawingml/2006/main">
               <a:ext uri="{FF2B5EF4-FFF2-40B4-BE49-F238E27FC236}">
-                <a16:creationId xmlns:a16="http://schemas.microsoft.com/office/drawing/2014/main" id="{1C119ED5-EF0A-4898-AEB4-DA031A016570}"/>
+                <a16:creationId xmlns:a16="http://schemas.microsoft.com/office/drawing/2014/main" id="{A0F122B4-AA66-409B-A36C-F79CD6FE1DD0}"/>
               </a:ext>
             </a:extLst>
           </p:cNvPr>
@@ -13103,7 +13111,7 @@
           <p:cNvPr id="2" name="">
             <a:extLst xmlns:a="http://schemas.openxmlformats.org/drawingml/2006/main">
               <a:ext uri="{FF2B5EF4-FFF2-40B4-BE49-F238E27FC236}">
-                <a16:creationId xmlns:a16="http://schemas.microsoft.com/office/drawing/2014/main" id="{473F10E6-FF66-4C1F-B28D-6F6B80162169}"/>
+                <a16:creationId xmlns:a16="http://schemas.microsoft.com/office/drawing/2014/main" id="{B83D0CC4-99DA-4D45-A5DF-523A4020FBFD}"/>
               </a:ext>
             </a:extLst>
           </p:cNvPr>
@@ -13160,7 +13168,7 @@
           <p:cNvPr id="3" name="">
             <a:extLst xmlns:a="http://schemas.openxmlformats.org/drawingml/2006/main">
               <a:ext uri="{FF2B5EF4-FFF2-40B4-BE49-F238E27FC236}">
-                <a16:creationId xmlns:a16="http://schemas.microsoft.com/office/drawing/2014/main" id="{3A38DBBA-A96D-4A8E-B36D-639DEAD65E94}"/>
+                <a16:creationId xmlns:a16="http://schemas.microsoft.com/office/drawing/2014/main" id="{062178D5-E278-4B2E-8989-B90CEB156A34}"/>
               </a:ext>
             </a:extLst>
           </p:cNvPr>
@@ -13192,7 +13200,7 @@
           <p:cNvPr id="4" name="">
             <a:extLst xmlns:a="http://schemas.openxmlformats.org/drawingml/2006/main">
               <a:ext uri="{FF2B5EF4-FFF2-40B4-BE49-F238E27FC236}">
-                <a16:creationId xmlns:a16="http://schemas.microsoft.com/office/drawing/2014/main" id="{F17C4876-1654-4C49-A8F3-68097495FF9A}"/>
+                <a16:creationId xmlns:a16="http://schemas.microsoft.com/office/drawing/2014/main" id="{8A7C533F-2974-4393-9071-D722BBFCEE93}"/>
               </a:ext>
             </a:extLst>
           </p:cNvPr>
@@ -13249,7 +13257,7 @@
           <p:cNvPr id="5" name="">
             <a:extLst xmlns:a="http://schemas.openxmlformats.org/drawingml/2006/main">
               <a:ext uri="{FF2B5EF4-FFF2-40B4-BE49-F238E27FC236}">
-                <a16:creationId xmlns:a16="http://schemas.microsoft.com/office/drawing/2014/main" id="{8B890757-E770-493A-978B-F7C4F81252F5}"/>
+                <a16:creationId xmlns:a16="http://schemas.microsoft.com/office/drawing/2014/main" id="{73FF7D3A-6338-43A1-AC0B-02B76200F73E}"/>
               </a:ext>
             </a:extLst>
           </p:cNvPr>
@@ -13306,7 +13314,7 @@
           <p:cNvPr id="6" name="">
             <a:extLst xmlns:a="http://schemas.openxmlformats.org/drawingml/2006/main">
               <a:ext uri="{FF2B5EF4-FFF2-40B4-BE49-F238E27FC236}">
-                <a16:creationId xmlns:a16="http://schemas.microsoft.com/office/drawing/2014/main" id="{380E5A0B-867A-4D37-B184-3A9FCFB0A785}"/>
+                <a16:creationId xmlns:a16="http://schemas.microsoft.com/office/drawing/2014/main" id="{3847B716-F391-4706-BDBD-7ABD9D2C9123}"/>
               </a:ext>
             </a:extLst>
           </p:cNvPr>
@@ -13363,7 +13371,7 @@
           <p:cNvPr id="7" name="">
             <a:extLst xmlns:a="http://schemas.openxmlformats.org/drawingml/2006/main">
               <a:ext uri="{FF2B5EF4-FFF2-40B4-BE49-F238E27FC236}">
-                <a16:creationId xmlns:a16="http://schemas.microsoft.com/office/drawing/2014/main" id="{4E4D623D-D38B-4D8E-BD8F-E6062ED08C28}"/>
+                <a16:creationId xmlns:a16="http://schemas.microsoft.com/office/drawing/2014/main" id="{2F83F4E7-5A71-4744-ABF3-82960BC28389}"/>
               </a:ext>
             </a:extLst>
           </p:cNvPr>
@@ -13395,7 +13403,7 @@
           <p:cNvPr id="8" name="">
             <a:extLst xmlns:a="http://schemas.openxmlformats.org/drawingml/2006/main">
               <a:ext uri="{FF2B5EF4-FFF2-40B4-BE49-F238E27FC236}">
-                <a16:creationId xmlns:a16="http://schemas.microsoft.com/office/drawing/2014/main" id="{97735B12-3460-42F7-81CD-881B9EDDBECF}"/>
+                <a16:creationId xmlns:a16="http://schemas.microsoft.com/office/drawing/2014/main" id="{A96C7E3F-3C83-4CF7-B06F-EC508C4819E2}"/>
               </a:ext>
             </a:extLst>
           </p:cNvPr>
@@ -13452,7 +13460,7 @@
           <p:cNvPr id="9" name="">
             <a:extLst xmlns:a="http://schemas.openxmlformats.org/drawingml/2006/main">
               <a:ext uri="{FF2B5EF4-FFF2-40B4-BE49-F238E27FC236}">
-                <a16:creationId xmlns:a16="http://schemas.microsoft.com/office/drawing/2014/main" id="{7EDE7E8F-BB1E-4715-BFD7-48E77820BE00}"/>
+                <a16:creationId xmlns:a16="http://schemas.microsoft.com/office/drawing/2014/main" id="{57784537-BC22-4ECA-9BD8-4FFB87E9A3CA}"/>
               </a:ext>
             </a:extLst>
           </p:cNvPr>
@@ -13509,7 +13517,7 @@
           <p:cNvPr id="10" name="">
             <a:extLst xmlns:a="http://schemas.openxmlformats.org/drawingml/2006/main">
               <a:ext uri="{FF2B5EF4-FFF2-40B4-BE49-F238E27FC236}">
-                <a16:creationId xmlns:a16="http://schemas.microsoft.com/office/drawing/2014/main" id="{7D07A2EA-4EEB-424F-A824-E2B1EF8E5547}"/>
+                <a16:creationId xmlns:a16="http://schemas.microsoft.com/office/drawing/2014/main" id="{E0A82AB5-90DB-4F82-9F78-BD5F3F966D42}"/>
               </a:ext>
             </a:extLst>
           </p:cNvPr>
@@ -13543,7 +13551,7 @@
           <p:cNvPr id="11" name="">
             <a:extLst xmlns:a="http://schemas.openxmlformats.org/drawingml/2006/main">
               <a:ext uri="{FF2B5EF4-FFF2-40B4-BE49-F238E27FC236}">
-                <a16:creationId xmlns:a16="http://schemas.microsoft.com/office/drawing/2014/main" id="{44A365DD-4AD4-44EC-957C-0863A05DF96C}"/>
+                <a16:creationId xmlns:a16="http://schemas.microsoft.com/office/drawing/2014/main" id="{9C02748E-FE4F-4833-B8DB-38966FF0E831}"/>
               </a:ext>
             </a:extLst>
           </p:cNvPr>
@@ -13575,7 +13583,7 @@
           <p:cNvPr id="12" name="">
             <a:extLst xmlns:a="http://schemas.openxmlformats.org/drawingml/2006/main">
               <a:ext uri="{FF2B5EF4-FFF2-40B4-BE49-F238E27FC236}">
-                <a16:creationId xmlns:a16="http://schemas.microsoft.com/office/drawing/2014/main" id="{9735B59B-A9D8-4EA1-AFAE-8AEE84B86905}"/>
+                <a16:creationId xmlns:a16="http://schemas.microsoft.com/office/drawing/2014/main" id="{0D3E84EB-6A0A-42BB-BAE5-C529830AFFFC}"/>
               </a:ext>
             </a:extLst>
           </p:cNvPr>
@@ -13632,7 +13640,7 @@
           <p:cNvPr id="13" name="">
             <a:extLst xmlns:a="http://schemas.openxmlformats.org/drawingml/2006/main">
               <a:ext uri="{FF2B5EF4-FFF2-40B4-BE49-F238E27FC236}">
-                <a16:creationId xmlns:a16="http://schemas.microsoft.com/office/drawing/2014/main" id="{32640918-8BA9-4722-B9DA-A19B8CFE35EC}"/>
+                <a16:creationId xmlns:a16="http://schemas.microsoft.com/office/drawing/2014/main" id="{CF4E1BAF-ECC4-43D1-9418-8CA7138B155A}"/>
               </a:ext>
             </a:extLst>
           </p:cNvPr>
@@ -13689,7 +13697,7 @@
           <p:cNvPr id="14" name="">
             <a:extLst xmlns:a="http://schemas.openxmlformats.org/drawingml/2006/main">
               <a:ext uri="{FF2B5EF4-FFF2-40B4-BE49-F238E27FC236}">
-                <a16:creationId xmlns:a16="http://schemas.microsoft.com/office/drawing/2014/main" id="{8F3DED3C-883B-4A59-BA08-F5E4A4B78C4B}"/>
+                <a16:creationId xmlns:a16="http://schemas.microsoft.com/office/drawing/2014/main" id="{EF12BBCB-AAFC-4679-A9F6-E5C9EF7C0778}"/>
               </a:ext>
             </a:extLst>
           </p:cNvPr>
@@ -13723,7 +13731,7 @@
           <p:cNvPr id="15" name="">
             <a:extLst xmlns:a="http://schemas.openxmlformats.org/drawingml/2006/main">
               <a:ext uri="{FF2B5EF4-FFF2-40B4-BE49-F238E27FC236}">
-                <a16:creationId xmlns:a16="http://schemas.microsoft.com/office/drawing/2014/main" id="{656614AD-A95B-4A9B-80A6-0B625116601F}"/>
+                <a16:creationId xmlns:a16="http://schemas.microsoft.com/office/drawing/2014/main" id="{CEB75C57-55E4-4F9A-8AE4-C63F209F5ECB}"/>
               </a:ext>
             </a:extLst>
           </p:cNvPr>
@@ -13755,7 +13763,7 @@
           <p:cNvPr id="16" name="">
             <a:extLst xmlns:a="http://schemas.openxmlformats.org/drawingml/2006/main">
               <a:ext uri="{FF2B5EF4-FFF2-40B4-BE49-F238E27FC236}">
-                <a16:creationId xmlns:a16="http://schemas.microsoft.com/office/drawing/2014/main" id="{B502A055-29B9-4AC8-B71B-E8AC1E666DEC}"/>
+                <a16:creationId xmlns:a16="http://schemas.microsoft.com/office/drawing/2014/main" id="{52963FF6-E15A-477D-ABE0-FCBAA1C8AFB6}"/>
               </a:ext>
             </a:extLst>
           </p:cNvPr>
@@ -13812,7 +13820,7 @@
           <p:cNvPr id="17" name="">
             <a:extLst xmlns:a="http://schemas.openxmlformats.org/drawingml/2006/main">
               <a:ext uri="{FF2B5EF4-FFF2-40B4-BE49-F238E27FC236}">
-                <a16:creationId xmlns:a16="http://schemas.microsoft.com/office/drawing/2014/main" id="{5B94A7DA-8252-4D81-8445-927913622943}"/>
+                <a16:creationId xmlns:a16="http://schemas.microsoft.com/office/drawing/2014/main" id="{20A032D1-2EE7-4C3C-B11F-700887B6935D}"/>
               </a:ext>
             </a:extLst>
           </p:cNvPr>
@@ -13869,7 +13877,7 @@
           <p:cNvPr id="18" name="">
             <a:extLst xmlns:a="http://schemas.openxmlformats.org/drawingml/2006/main">
               <a:ext uri="{FF2B5EF4-FFF2-40B4-BE49-F238E27FC236}">
-                <a16:creationId xmlns:a16="http://schemas.microsoft.com/office/drawing/2014/main" id="{C5E7B263-3062-49A8-9780-27E9586A175E}"/>
+                <a16:creationId xmlns:a16="http://schemas.microsoft.com/office/drawing/2014/main" id="{1ACE2A9D-DB88-4404-B8C8-85B7E34DB185}"/>
               </a:ext>
             </a:extLst>
           </p:cNvPr>
@@ -13903,7 +13911,7 @@
           <p:cNvPr id="19" name="">
             <a:extLst xmlns:a="http://schemas.openxmlformats.org/drawingml/2006/main">
               <a:ext uri="{FF2B5EF4-FFF2-40B4-BE49-F238E27FC236}">
-                <a16:creationId xmlns:a16="http://schemas.microsoft.com/office/drawing/2014/main" id="{7EBDFBF9-7A6D-4E78-BBF0-6353949F5B8C}"/>
+                <a16:creationId xmlns:a16="http://schemas.microsoft.com/office/drawing/2014/main" id="{16C1011F-2997-475B-9910-26505007202E}"/>
               </a:ext>
             </a:extLst>
           </p:cNvPr>
@@ -13935,7 +13943,7 @@
           <p:cNvPr id="20" name="">
             <a:extLst xmlns:a="http://schemas.openxmlformats.org/drawingml/2006/main">
               <a:ext uri="{FF2B5EF4-FFF2-40B4-BE49-F238E27FC236}">
-                <a16:creationId xmlns:a16="http://schemas.microsoft.com/office/drawing/2014/main" id="{1FABEBDA-6B1F-4972-B489-8DA6089311B0}"/>
+                <a16:creationId xmlns:a16="http://schemas.microsoft.com/office/drawing/2014/main" id="{AD197018-6009-421B-B2A5-9CA536979E86}"/>
               </a:ext>
             </a:extLst>
           </p:cNvPr>
@@ -13992,7 +14000,7 @@
           <p:cNvPr id="21" name="">
             <a:extLst xmlns:a="http://schemas.openxmlformats.org/drawingml/2006/main">
               <a:ext uri="{FF2B5EF4-FFF2-40B4-BE49-F238E27FC236}">
-                <a16:creationId xmlns:a16="http://schemas.microsoft.com/office/drawing/2014/main" id="{97F37D40-5912-4687-A3B8-580E8F0E6E13}"/>
+                <a16:creationId xmlns:a16="http://schemas.microsoft.com/office/drawing/2014/main" id="{CBFC34D3-8DDA-4E07-B0F7-523702603D5D}"/>
               </a:ext>
             </a:extLst>
           </p:cNvPr>
@@ -14047,7 +14055,7 @@
     </p:spTree>
     <p:extLst>
       <p:ext uri="{BB962C8B-B14F-4D97-AF65-F5344CB8AC3E}">
-        <p14:creationId xmlns:p14="http://schemas.microsoft.com/office/powerpoint/2010/main" val="1032059364"/>
+        <p14:creationId xmlns:p14="http://schemas.microsoft.com/office/powerpoint/2010/main" val="1228263483"/>
       </p:ext>
     </p:extLst>
   </p:cSld>
